--- a/New Zealand airbnb dataset.pptx
+++ b/New Zealand airbnb dataset.pptx
@@ -1966,7 +1966,15 @@
           </a:r>
           <a:r>
             <a:rPr lang="en-GB" sz="2400" dirty="0"/>
-            <a:t> with low high availability homes/</a:t>
+            <a:t> in </a:t>
+          </a:r>
+          <a:r>
+            <a:rPr lang="en-GB" sz="2400"/>
+            <a:t>regions with lower </a:t>
+          </a:r>
+          <a:r>
+            <a:rPr lang="en-GB" sz="2400" dirty="0"/>
+            <a:t>high availability homes/</a:t>
           </a:r>
           <a:r>
             <a:rPr lang="en-GB" sz="2400" dirty="0" err="1"/>
@@ -2619,7 +2627,15 @@
           </a:r>
           <a:r>
             <a:rPr lang="en-GB" sz="2400" kern="1200" dirty="0"/>
-            <a:t> with low high availability homes/</a:t>
+            <a:t> in </a:t>
+          </a:r>
+          <a:r>
+            <a:rPr lang="en-GB" sz="2400" kern="1200"/>
+            <a:t>regions with lower </a:t>
+          </a:r>
+          <a:r>
+            <a:rPr lang="en-GB" sz="2400" kern="1200" dirty="0"/>
+            <a:t>high availability homes/</a:t>
           </a:r>
           <a:r>
             <a:rPr lang="en-GB" sz="2400" kern="1200" dirty="0" err="1"/>
@@ -9745,7 +9761,7 @@
           <p:nvPr>
             <p:extLst>
               <p:ext uri="{D42A27DB-BD31-4B8C-83A1-F6EECF244321}">
-                <p14:modId xmlns:p14="http://schemas.microsoft.com/office/powerpoint/2010/main" val="294885108"/>
+                <p14:modId xmlns:p14="http://schemas.microsoft.com/office/powerpoint/2010/main" val="821063523"/>
               </p:ext>
             </p:extLst>
           </p:nvPr>

--- a/New Zealand airbnb dataset.pptx
+++ b/New Zealand airbnb dataset.pptx
@@ -9,8 +9,9 @@
     <p:sldId id="257" r:id="rId3"/>
     <p:sldId id="258" r:id="rId4"/>
     <p:sldId id="259" r:id="rId5"/>
-    <p:sldId id="261" r:id="rId6"/>
-    <p:sldId id="260" r:id="rId7"/>
+    <p:sldId id="262" r:id="rId6"/>
+    <p:sldId id="261" r:id="rId7"/>
+    <p:sldId id="260" r:id="rId8"/>
   </p:sldIdLst>
   <p:sldSz cx="12192000" cy="6858000"/>
   <p:notesSz cx="6858000" cy="9144000"/>
@@ -118,753 +119,6 @@
 </file>
 
 <file path=ppt/diagrams/colors1.xml><?xml version="1.0" encoding="utf-8"?>
-<dgm:colorsDef xmlns:dgm="http://schemas.openxmlformats.org/drawingml/2006/diagram" xmlns:a="http://schemas.openxmlformats.org/drawingml/2006/main" uniqueId="urn:microsoft.com/office/officeart/2005/8/colors/accent1_2#14">
-  <dgm:title val=""/>
-  <dgm:desc val=""/>
-  <dgm:catLst>
-    <dgm:cat type="accent1" pri="11200"/>
-  </dgm:catLst>
-  <dgm:styleLbl name="node0">
-    <dgm:fillClrLst meth="repeat">
-      <a:schemeClr val="accent1"/>
-    </dgm:fillClrLst>
-    <dgm:linClrLst meth="repeat">
-      <a:schemeClr val="lt1"/>
-    </dgm:linClrLst>
-    <dgm:effectClrLst/>
-    <dgm:txLinClrLst/>
-    <dgm:txFillClrLst/>
-    <dgm:txEffectClrLst/>
-  </dgm:styleLbl>
-  <dgm:styleLbl name="alignNode1">
-    <dgm:fillClrLst meth="repeat">
-      <a:schemeClr val="accent1"/>
-    </dgm:fillClrLst>
-    <dgm:linClrLst meth="repeat">
-      <a:schemeClr val="accent1"/>
-    </dgm:linClrLst>
-    <dgm:effectClrLst/>
-    <dgm:txLinClrLst/>
-    <dgm:txFillClrLst/>
-    <dgm:txEffectClrLst/>
-  </dgm:styleLbl>
-  <dgm:styleLbl name="node1">
-    <dgm:fillClrLst meth="repeat">
-      <a:schemeClr val="accent1"/>
-    </dgm:fillClrLst>
-    <dgm:linClrLst meth="repeat">
-      <a:schemeClr val="lt1"/>
-    </dgm:linClrLst>
-    <dgm:effectClrLst/>
-    <dgm:txLinClrLst/>
-    <dgm:txFillClrLst/>
-    <dgm:txEffectClrLst/>
-  </dgm:styleLbl>
-  <dgm:styleLbl name="lnNode1">
-    <dgm:fillClrLst meth="repeat">
-      <a:schemeClr val="accent1"/>
-    </dgm:fillClrLst>
-    <dgm:linClrLst meth="repeat">
-      <a:schemeClr val="lt1"/>
-    </dgm:linClrLst>
-    <dgm:effectClrLst/>
-    <dgm:txLinClrLst/>
-    <dgm:txFillClrLst/>
-    <dgm:txEffectClrLst/>
-  </dgm:styleLbl>
-  <dgm:styleLbl name="vennNode1">
-    <dgm:fillClrLst meth="repeat">
-      <a:schemeClr val="accent1">
-        <a:alpha val="50000"/>
-      </a:schemeClr>
-    </dgm:fillClrLst>
-    <dgm:linClrLst meth="repeat">
-      <a:schemeClr val="lt1"/>
-    </dgm:linClrLst>
-    <dgm:effectClrLst/>
-    <dgm:txLinClrLst/>
-    <dgm:txFillClrLst/>
-    <dgm:txEffectClrLst/>
-  </dgm:styleLbl>
-  <dgm:styleLbl name="node2">
-    <dgm:fillClrLst meth="repeat">
-      <a:schemeClr val="accent1"/>
-    </dgm:fillClrLst>
-    <dgm:linClrLst meth="repeat">
-      <a:schemeClr val="lt1"/>
-    </dgm:linClrLst>
-    <dgm:effectClrLst/>
-    <dgm:txLinClrLst/>
-    <dgm:txFillClrLst/>
-    <dgm:txEffectClrLst/>
-  </dgm:styleLbl>
-  <dgm:styleLbl name="node3">
-    <dgm:fillClrLst meth="repeat">
-      <a:schemeClr val="accent1"/>
-    </dgm:fillClrLst>
-    <dgm:linClrLst meth="repeat">
-      <a:schemeClr val="lt1"/>
-    </dgm:linClrLst>
-    <dgm:effectClrLst/>
-    <dgm:txLinClrLst/>
-    <dgm:txFillClrLst/>
-    <dgm:txEffectClrLst/>
-  </dgm:styleLbl>
-  <dgm:styleLbl name="node4">
-    <dgm:fillClrLst meth="repeat">
-      <a:schemeClr val="accent1"/>
-    </dgm:fillClrLst>
-    <dgm:linClrLst meth="repeat">
-      <a:schemeClr val="lt1"/>
-    </dgm:linClrLst>
-    <dgm:effectClrLst/>
-    <dgm:txLinClrLst/>
-    <dgm:txFillClrLst/>
-    <dgm:txEffectClrLst/>
-  </dgm:styleLbl>
-  <dgm:styleLbl name="fgImgPlace1">
-    <dgm:fillClrLst meth="repeat">
-      <a:schemeClr val="accent1">
-        <a:tint val="50000"/>
-      </a:schemeClr>
-    </dgm:fillClrLst>
-    <dgm:linClrLst meth="repeat">
-      <a:schemeClr val="lt1"/>
-    </dgm:linClrLst>
-    <dgm:effectClrLst/>
-    <dgm:txLinClrLst/>
-    <dgm:txFillClrLst meth="repeat">
-      <a:schemeClr val="lt1"/>
-    </dgm:txFillClrLst>
-    <dgm:txEffectClrLst/>
-  </dgm:styleLbl>
-  <dgm:styleLbl name="alignImgPlace1">
-    <dgm:fillClrLst meth="repeat">
-      <a:schemeClr val="accent1">
-        <a:tint val="50000"/>
-      </a:schemeClr>
-    </dgm:fillClrLst>
-    <dgm:linClrLst meth="repeat">
-      <a:schemeClr val="lt1"/>
-    </dgm:linClrLst>
-    <dgm:effectClrLst/>
-    <dgm:txLinClrLst/>
-    <dgm:txFillClrLst meth="repeat">
-      <a:schemeClr val="lt1"/>
-    </dgm:txFillClrLst>
-    <dgm:txEffectClrLst/>
-  </dgm:styleLbl>
-  <dgm:styleLbl name="bgImgPlace1">
-    <dgm:fillClrLst meth="repeat">
-      <a:schemeClr val="accent1">
-        <a:tint val="50000"/>
-      </a:schemeClr>
-    </dgm:fillClrLst>
-    <dgm:linClrLst meth="repeat">
-      <a:schemeClr val="lt1"/>
-    </dgm:linClrLst>
-    <dgm:effectClrLst/>
-    <dgm:txLinClrLst/>
-    <dgm:txFillClrLst meth="repeat">
-      <a:schemeClr val="lt1"/>
-    </dgm:txFillClrLst>
-    <dgm:txEffectClrLst/>
-  </dgm:styleLbl>
-  <dgm:styleLbl name="sibTrans2D1">
-    <dgm:fillClrLst meth="repeat">
-      <a:schemeClr val="accent1">
-        <a:tint val="60000"/>
-      </a:schemeClr>
-    </dgm:fillClrLst>
-    <dgm:linClrLst meth="repeat">
-      <a:schemeClr val="accent1">
-        <a:tint val="60000"/>
-      </a:schemeClr>
-    </dgm:linClrLst>
-    <dgm:effectClrLst/>
-    <dgm:txLinClrLst/>
-    <dgm:txFillClrLst/>
-    <dgm:txEffectClrLst/>
-  </dgm:styleLbl>
-  <dgm:styleLbl name="fgSibTrans2D1">
-    <dgm:fillClrLst meth="repeat">
-      <a:schemeClr val="accent1">
-        <a:tint val="60000"/>
-      </a:schemeClr>
-    </dgm:fillClrLst>
-    <dgm:linClrLst meth="repeat">
-      <a:schemeClr val="accent1">
-        <a:tint val="60000"/>
-      </a:schemeClr>
-    </dgm:linClrLst>
-    <dgm:effectClrLst/>
-    <dgm:txLinClrLst/>
-    <dgm:txFillClrLst/>
-    <dgm:txEffectClrLst/>
-  </dgm:styleLbl>
-  <dgm:styleLbl name="bgSibTrans2D1">
-    <dgm:fillClrLst meth="repeat">
-      <a:schemeClr val="accent1">
-        <a:tint val="60000"/>
-      </a:schemeClr>
-    </dgm:fillClrLst>
-    <dgm:linClrLst meth="repeat">
-      <a:schemeClr val="accent1">
-        <a:tint val="60000"/>
-      </a:schemeClr>
-    </dgm:linClrLst>
-    <dgm:effectClrLst/>
-    <dgm:txLinClrLst/>
-    <dgm:txFillClrLst/>
-    <dgm:txEffectClrLst/>
-  </dgm:styleLbl>
-  <dgm:styleLbl name="sibTrans1D1">
-    <dgm:fillClrLst meth="repeat">
-      <a:schemeClr val="accent1"/>
-    </dgm:fillClrLst>
-    <dgm:linClrLst meth="repeat">
-      <a:schemeClr val="accent1"/>
-    </dgm:linClrLst>
-    <dgm:effectClrLst/>
-    <dgm:txLinClrLst/>
-    <dgm:txFillClrLst meth="repeat">
-      <a:schemeClr val="tx1"/>
-    </dgm:txFillClrLst>
-    <dgm:txEffectClrLst/>
-  </dgm:styleLbl>
-  <dgm:styleLbl name="callout">
-    <dgm:fillClrLst meth="repeat">
-      <a:schemeClr val="accent1"/>
-    </dgm:fillClrLst>
-    <dgm:linClrLst meth="repeat">
-      <a:schemeClr val="accent1">
-        <a:tint val="50000"/>
-      </a:schemeClr>
-    </dgm:linClrLst>
-    <dgm:effectClrLst/>
-    <dgm:txLinClrLst/>
-    <dgm:txFillClrLst meth="repeat">
-      <a:schemeClr val="tx1"/>
-    </dgm:txFillClrLst>
-    <dgm:txEffectClrLst/>
-  </dgm:styleLbl>
-  <dgm:styleLbl name="asst0">
-    <dgm:fillClrLst meth="repeat">
-      <a:schemeClr val="accent1"/>
-    </dgm:fillClrLst>
-    <dgm:linClrLst meth="repeat">
-      <a:schemeClr val="lt1"/>
-    </dgm:linClrLst>
-    <dgm:effectClrLst/>
-    <dgm:txLinClrLst/>
-    <dgm:txFillClrLst/>
-    <dgm:txEffectClrLst/>
-  </dgm:styleLbl>
-  <dgm:styleLbl name="asst1">
-    <dgm:fillClrLst meth="repeat">
-      <a:schemeClr val="accent1"/>
-    </dgm:fillClrLst>
-    <dgm:linClrLst meth="repeat">
-      <a:schemeClr val="lt1"/>
-    </dgm:linClrLst>
-    <dgm:effectClrLst/>
-    <dgm:txLinClrLst/>
-    <dgm:txFillClrLst/>
-    <dgm:txEffectClrLst/>
-  </dgm:styleLbl>
-  <dgm:styleLbl name="asst2">
-    <dgm:fillClrLst meth="repeat">
-      <a:schemeClr val="accent1"/>
-    </dgm:fillClrLst>
-    <dgm:linClrLst meth="repeat">
-      <a:schemeClr val="lt1"/>
-    </dgm:linClrLst>
-    <dgm:effectClrLst/>
-    <dgm:txLinClrLst/>
-    <dgm:txFillClrLst/>
-    <dgm:txEffectClrLst/>
-  </dgm:styleLbl>
-  <dgm:styleLbl name="asst3">
-    <dgm:fillClrLst meth="repeat">
-      <a:schemeClr val="accent1"/>
-    </dgm:fillClrLst>
-    <dgm:linClrLst meth="repeat">
-      <a:schemeClr val="lt1"/>
-    </dgm:linClrLst>
-    <dgm:effectClrLst/>
-    <dgm:txLinClrLst/>
-    <dgm:txFillClrLst/>
-    <dgm:txEffectClrLst/>
-  </dgm:styleLbl>
-  <dgm:styleLbl name="asst4">
-    <dgm:fillClrLst meth="repeat">
-      <a:schemeClr val="accent1"/>
-    </dgm:fillClrLst>
-    <dgm:linClrLst meth="repeat">
-      <a:schemeClr val="lt1"/>
-    </dgm:linClrLst>
-    <dgm:effectClrLst/>
-    <dgm:txLinClrLst/>
-    <dgm:txFillClrLst/>
-    <dgm:txEffectClrLst/>
-  </dgm:styleLbl>
-  <dgm:styleLbl name="parChTrans2D1">
-    <dgm:fillClrLst meth="repeat">
-      <a:schemeClr val="accent1">
-        <a:tint val="60000"/>
-      </a:schemeClr>
-    </dgm:fillClrLst>
-    <dgm:linClrLst meth="repeat">
-      <a:schemeClr val="accent1">
-        <a:tint val="60000"/>
-      </a:schemeClr>
-    </dgm:linClrLst>
-    <dgm:effectClrLst/>
-    <dgm:txLinClrLst/>
-    <dgm:txFillClrLst meth="repeat">
-      <a:schemeClr val="lt1"/>
-    </dgm:txFillClrLst>
-    <dgm:txEffectClrLst/>
-  </dgm:styleLbl>
-  <dgm:styleLbl name="parChTrans2D2">
-    <dgm:fillClrLst meth="repeat">
-      <a:schemeClr val="accent1"/>
-    </dgm:fillClrLst>
-    <dgm:linClrLst meth="repeat">
-      <a:schemeClr val="accent1"/>
-    </dgm:linClrLst>
-    <dgm:effectClrLst/>
-    <dgm:txLinClrLst/>
-    <dgm:txFillClrLst meth="repeat">
-      <a:schemeClr val="lt1"/>
-    </dgm:txFillClrLst>
-    <dgm:txEffectClrLst/>
-  </dgm:styleLbl>
-  <dgm:styleLbl name="parChTrans2D3">
-    <dgm:fillClrLst meth="repeat">
-      <a:schemeClr val="accent1"/>
-    </dgm:fillClrLst>
-    <dgm:linClrLst meth="repeat">
-      <a:schemeClr val="accent1"/>
-    </dgm:linClrLst>
-    <dgm:effectClrLst/>
-    <dgm:txLinClrLst/>
-    <dgm:txFillClrLst meth="repeat">
-      <a:schemeClr val="lt1"/>
-    </dgm:txFillClrLst>
-    <dgm:txEffectClrLst/>
-  </dgm:styleLbl>
-  <dgm:styleLbl name="parChTrans2D4">
-    <dgm:fillClrLst meth="repeat">
-      <a:schemeClr val="accent1"/>
-    </dgm:fillClrLst>
-    <dgm:linClrLst meth="repeat">
-      <a:schemeClr val="accent1"/>
-    </dgm:linClrLst>
-    <dgm:effectClrLst/>
-    <dgm:txLinClrLst/>
-    <dgm:txFillClrLst meth="repeat">
-      <a:schemeClr val="lt1"/>
-    </dgm:txFillClrLst>
-    <dgm:txEffectClrLst/>
-  </dgm:styleLbl>
-  <dgm:styleLbl name="parChTrans1D1">
-    <dgm:fillClrLst meth="repeat">
-      <a:schemeClr val="accent1"/>
-    </dgm:fillClrLst>
-    <dgm:linClrLst meth="repeat">
-      <a:schemeClr val="accent1">
-        <a:shade val="60000"/>
-      </a:schemeClr>
-    </dgm:linClrLst>
-    <dgm:effectClrLst/>
-    <dgm:txLinClrLst/>
-    <dgm:txFillClrLst meth="repeat">
-      <a:schemeClr val="tx1"/>
-    </dgm:txFillClrLst>
-    <dgm:txEffectClrLst/>
-  </dgm:styleLbl>
-  <dgm:styleLbl name="parChTrans1D2">
-    <dgm:fillClrLst meth="repeat">
-      <a:schemeClr val="accent1"/>
-    </dgm:fillClrLst>
-    <dgm:linClrLst meth="repeat">
-      <a:schemeClr val="accent1">
-        <a:shade val="60000"/>
-      </a:schemeClr>
-    </dgm:linClrLst>
-    <dgm:effectClrLst/>
-    <dgm:txLinClrLst/>
-    <dgm:txFillClrLst meth="repeat">
-      <a:schemeClr val="tx1"/>
-    </dgm:txFillClrLst>
-    <dgm:txEffectClrLst/>
-  </dgm:styleLbl>
-  <dgm:styleLbl name="parChTrans1D3">
-    <dgm:fillClrLst meth="repeat">
-      <a:schemeClr val="accent1"/>
-    </dgm:fillClrLst>
-    <dgm:linClrLst meth="repeat">
-      <a:schemeClr val="accent1">
-        <a:shade val="80000"/>
-      </a:schemeClr>
-    </dgm:linClrLst>
-    <dgm:effectClrLst/>
-    <dgm:txLinClrLst/>
-    <dgm:txFillClrLst meth="repeat">
-      <a:schemeClr val="tx1"/>
-    </dgm:txFillClrLst>
-    <dgm:txEffectClrLst/>
-  </dgm:styleLbl>
-  <dgm:styleLbl name="parChTrans1D4">
-    <dgm:fillClrLst meth="repeat">
-      <a:schemeClr val="accent1"/>
-    </dgm:fillClrLst>
-    <dgm:linClrLst meth="repeat">
-      <a:schemeClr val="accent1">
-        <a:shade val="80000"/>
-      </a:schemeClr>
-    </dgm:linClrLst>
-    <dgm:effectClrLst/>
-    <dgm:txLinClrLst/>
-    <dgm:txFillClrLst meth="repeat">
-      <a:schemeClr val="tx1"/>
-    </dgm:txFillClrLst>
-    <dgm:txEffectClrLst/>
-  </dgm:styleLbl>
-  <dgm:styleLbl name="fgAcc1">
-    <dgm:fillClrLst meth="repeat">
-      <a:schemeClr val="lt1">
-        <a:alpha val="90000"/>
-      </a:schemeClr>
-    </dgm:fillClrLst>
-    <dgm:linClrLst meth="repeat">
-      <a:schemeClr val="accent1"/>
-    </dgm:linClrLst>
-    <dgm:effectClrLst/>
-    <dgm:txLinClrLst/>
-    <dgm:txFillClrLst meth="repeat">
-      <a:schemeClr val="dk1"/>
-    </dgm:txFillClrLst>
-    <dgm:txEffectClrLst/>
-  </dgm:styleLbl>
-  <dgm:styleLbl name="conFgAcc1">
-    <dgm:fillClrLst meth="repeat">
-      <a:schemeClr val="lt1">
-        <a:alpha val="90000"/>
-      </a:schemeClr>
-    </dgm:fillClrLst>
-    <dgm:linClrLst meth="repeat">
-      <a:schemeClr val="accent1"/>
-    </dgm:linClrLst>
-    <dgm:effectClrLst/>
-    <dgm:txLinClrLst/>
-    <dgm:txFillClrLst meth="repeat">
-      <a:schemeClr val="dk1"/>
-    </dgm:txFillClrLst>
-    <dgm:txEffectClrLst/>
-  </dgm:styleLbl>
-  <dgm:styleLbl name="alignAcc1">
-    <dgm:fillClrLst meth="repeat">
-      <a:schemeClr val="lt1">
-        <a:alpha val="90000"/>
-      </a:schemeClr>
-    </dgm:fillClrLst>
-    <dgm:linClrLst meth="repeat">
-      <a:schemeClr val="accent1"/>
-    </dgm:linClrLst>
-    <dgm:effectClrLst/>
-    <dgm:txLinClrLst/>
-    <dgm:txFillClrLst meth="repeat">
-      <a:schemeClr val="dk1"/>
-    </dgm:txFillClrLst>
-    <dgm:txEffectClrLst/>
-  </dgm:styleLbl>
-  <dgm:styleLbl name="trAlignAcc1">
-    <dgm:fillClrLst meth="repeat">
-      <a:schemeClr val="lt1">
-        <a:alpha val="40000"/>
-      </a:schemeClr>
-    </dgm:fillClrLst>
-    <dgm:linClrLst meth="repeat">
-      <a:schemeClr val="accent1"/>
-    </dgm:linClrLst>
-    <dgm:effectClrLst/>
-    <dgm:txLinClrLst/>
-    <dgm:txFillClrLst meth="repeat">
-      <a:schemeClr val="dk1"/>
-    </dgm:txFillClrLst>
-    <dgm:txEffectClrLst/>
-  </dgm:styleLbl>
-  <dgm:styleLbl name="bgAcc1">
-    <dgm:fillClrLst meth="repeat">
-      <a:schemeClr val="lt1">
-        <a:alpha val="90000"/>
-      </a:schemeClr>
-    </dgm:fillClrLst>
-    <dgm:linClrLst meth="repeat">
-      <a:schemeClr val="accent1"/>
-    </dgm:linClrLst>
-    <dgm:effectClrLst/>
-    <dgm:txLinClrLst/>
-    <dgm:txFillClrLst meth="repeat">
-      <a:schemeClr val="dk1"/>
-    </dgm:txFillClrLst>
-    <dgm:txEffectClrLst/>
-  </dgm:styleLbl>
-  <dgm:styleLbl name="solidFgAcc1">
-    <dgm:fillClrLst meth="repeat">
-      <a:schemeClr val="lt1"/>
-    </dgm:fillClrLst>
-    <dgm:linClrLst meth="repeat">
-      <a:schemeClr val="accent1"/>
-    </dgm:linClrLst>
-    <dgm:effectClrLst/>
-    <dgm:txLinClrLst/>
-    <dgm:txFillClrLst meth="repeat">
-      <a:schemeClr val="dk1"/>
-    </dgm:txFillClrLst>
-    <dgm:txEffectClrLst/>
-  </dgm:styleLbl>
-  <dgm:styleLbl name="solidAlignAcc1">
-    <dgm:fillClrLst meth="repeat">
-      <a:schemeClr val="lt1"/>
-    </dgm:fillClrLst>
-    <dgm:linClrLst meth="repeat">
-      <a:schemeClr val="accent1"/>
-    </dgm:linClrLst>
-    <dgm:effectClrLst/>
-    <dgm:txLinClrLst/>
-    <dgm:txFillClrLst meth="repeat">
-      <a:schemeClr val="dk1"/>
-    </dgm:txFillClrLst>
-    <dgm:txEffectClrLst/>
-  </dgm:styleLbl>
-  <dgm:styleLbl name="solidBgAcc1">
-    <dgm:fillClrLst meth="repeat">
-      <a:schemeClr val="lt1"/>
-    </dgm:fillClrLst>
-    <dgm:linClrLst meth="repeat">
-      <a:schemeClr val="accent1"/>
-    </dgm:linClrLst>
-    <dgm:effectClrLst/>
-    <dgm:txLinClrLst/>
-    <dgm:txFillClrLst meth="repeat">
-      <a:schemeClr val="dk1"/>
-    </dgm:txFillClrLst>
-    <dgm:txEffectClrLst/>
-  </dgm:styleLbl>
-  <dgm:styleLbl name="fgAccFollowNode1">
-    <dgm:fillClrLst meth="repeat">
-      <a:schemeClr val="accent1">
-        <a:alpha val="90000"/>
-        <a:tint val="40000"/>
-      </a:schemeClr>
-    </dgm:fillClrLst>
-    <dgm:linClrLst meth="repeat">
-      <a:schemeClr val="accent1">
-        <a:alpha val="90000"/>
-        <a:tint val="40000"/>
-      </a:schemeClr>
-    </dgm:linClrLst>
-    <dgm:effectClrLst/>
-    <dgm:txLinClrLst/>
-    <dgm:txFillClrLst meth="repeat">
-      <a:schemeClr val="dk1"/>
-    </dgm:txFillClrLst>
-    <dgm:txEffectClrLst/>
-  </dgm:styleLbl>
-  <dgm:styleLbl name="alignAccFollowNode1">
-    <dgm:fillClrLst meth="repeat">
-      <a:schemeClr val="accent1">
-        <a:alpha val="90000"/>
-        <a:tint val="40000"/>
-      </a:schemeClr>
-    </dgm:fillClrLst>
-    <dgm:linClrLst meth="repeat">
-      <a:schemeClr val="accent1">
-        <a:alpha val="90000"/>
-        <a:tint val="40000"/>
-      </a:schemeClr>
-    </dgm:linClrLst>
-    <dgm:effectClrLst/>
-    <dgm:txLinClrLst/>
-    <dgm:txFillClrLst meth="repeat">
-      <a:schemeClr val="dk1"/>
-    </dgm:txFillClrLst>
-    <dgm:txEffectClrLst/>
-  </dgm:styleLbl>
-  <dgm:styleLbl name="bgAccFollowNode1">
-    <dgm:fillClrLst meth="repeat">
-      <a:schemeClr val="accent1">
-        <a:alpha val="90000"/>
-        <a:tint val="40000"/>
-      </a:schemeClr>
-    </dgm:fillClrLst>
-    <dgm:linClrLst meth="repeat">
-      <a:schemeClr val="accent1">
-        <a:alpha val="90000"/>
-        <a:tint val="40000"/>
-      </a:schemeClr>
-    </dgm:linClrLst>
-    <dgm:effectClrLst/>
-    <dgm:txLinClrLst/>
-    <dgm:txFillClrLst meth="repeat">
-      <a:schemeClr val="dk1"/>
-    </dgm:txFillClrLst>
-    <dgm:txEffectClrLst/>
-  </dgm:styleLbl>
-  <dgm:styleLbl name="fgAcc0">
-    <dgm:fillClrLst meth="repeat">
-      <a:schemeClr val="lt1">
-        <a:alpha val="90000"/>
-      </a:schemeClr>
-    </dgm:fillClrLst>
-    <dgm:linClrLst meth="repeat">
-      <a:schemeClr val="accent1"/>
-    </dgm:linClrLst>
-    <dgm:effectClrLst/>
-    <dgm:txLinClrLst/>
-    <dgm:txFillClrLst meth="repeat">
-      <a:schemeClr val="dk1"/>
-    </dgm:txFillClrLst>
-    <dgm:txEffectClrLst/>
-  </dgm:styleLbl>
-  <dgm:styleLbl name="fgAcc2">
-    <dgm:fillClrLst meth="repeat">
-      <a:schemeClr val="lt1">
-        <a:alpha val="90000"/>
-      </a:schemeClr>
-    </dgm:fillClrLst>
-    <dgm:linClrLst meth="repeat">
-      <a:schemeClr val="accent1"/>
-    </dgm:linClrLst>
-    <dgm:effectClrLst/>
-    <dgm:txLinClrLst/>
-    <dgm:txFillClrLst meth="repeat">
-      <a:schemeClr val="dk1"/>
-    </dgm:txFillClrLst>
-    <dgm:txEffectClrLst/>
-  </dgm:styleLbl>
-  <dgm:styleLbl name="fgAcc3">
-    <dgm:fillClrLst meth="repeat">
-      <a:schemeClr val="lt1">
-        <a:alpha val="90000"/>
-      </a:schemeClr>
-    </dgm:fillClrLst>
-    <dgm:linClrLst meth="repeat">
-      <a:schemeClr val="accent1"/>
-    </dgm:linClrLst>
-    <dgm:effectClrLst/>
-    <dgm:txLinClrLst/>
-    <dgm:txFillClrLst meth="repeat">
-      <a:schemeClr val="dk1"/>
-    </dgm:txFillClrLst>
-    <dgm:txEffectClrLst/>
-  </dgm:styleLbl>
-  <dgm:styleLbl name="fgAcc4">
-    <dgm:fillClrLst meth="repeat">
-      <a:schemeClr val="lt1">
-        <a:alpha val="90000"/>
-      </a:schemeClr>
-    </dgm:fillClrLst>
-    <dgm:linClrLst meth="repeat">
-      <a:schemeClr val="accent1"/>
-    </dgm:linClrLst>
-    <dgm:effectClrLst/>
-    <dgm:txLinClrLst/>
-    <dgm:txFillClrLst meth="repeat">
-      <a:schemeClr val="dk1"/>
-    </dgm:txFillClrLst>
-    <dgm:txEffectClrLst/>
-  </dgm:styleLbl>
-  <dgm:styleLbl name="bgShp">
-    <dgm:fillClrLst meth="repeat">
-      <a:schemeClr val="accent1">
-        <a:tint val="40000"/>
-      </a:schemeClr>
-    </dgm:fillClrLst>
-    <dgm:linClrLst meth="repeat">
-      <a:schemeClr val="accent1"/>
-    </dgm:linClrLst>
-    <dgm:effectClrLst/>
-    <dgm:txLinClrLst/>
-    <dgm:txFillClrLst meth="repeat">
-      <a:schemeClr val="dk1"/>
-    </dgm:txFillClrLst>
-    <dgm:txEffectClrLst/>
-  </dgm:styleLbl>
-  <dgm:styleLbl name="dkBgShp">
-    <dgm:fillClrLst meth="repeat">
-      <a:schemeClr val="accent1">
-        <a:shade val="80000"/>
-      </a:schemeClr>
-    </dgm:fillClrLst>
-    <dgm:linClrLst meth="repeat">
-      <a:schemeClr val="accent1"/>
-    </dgm:linClrLst>
-    <dgm:effectClrLst/>
-    <dgm:txLinClrLst/>
-    <dgm:txFillClrLst meth="repeat">
-      <a:schemeClr val="lt1"/>
-    </dgm:txFillClrLst>
-    <dgm:txEffectClrLst/>
-  </dgm:styleLbl>
-  <dgm:styleLbl name="trBgShp">
-    <dgm:fillClrLst meth="repeat">
-      <a:schemeClr val="accent1">
-        <a:tint val="50000"/>
-        <a:alpha val="40000"/>
-      </a:schemeClr>
-    </dgm:fillClrLst>
-    <dgm:linClrLst meth="repeat">
-      <a:schemeClr val="accent1"/>
-    </dgm:linClrLst>
-    <dgm:effectClrLst/>
-    <dgm:txLinClrLst/>
-    <dgm:txFillClrLst meth="repeat">
-      <a:schemeClr val="lt1"/>
-    </dgm:txFillClrLst>
-    <dgm:txEffectClrLst/>
-  </dgm:styleLbl>
-  <dgm:styleLbl name="fgShp">
-    <dgm:fillClrLst meth="repeat">
-      <a:schemeClr val="accent1">
-        <a:tint val="60000"/>
-      </a:schemeClr>
-    </dgm:fillClrLst>
-    <dgm:linClrLst meth="repeat">
-      <a:schemeClr val="lt1"/>
-    </dgm:linClrLst>
-    <dgm:effectClrLst/>
-    <dgm:txLinClrLst/>
-    <dgm:txFillClrLst meth="repeat">
-      <a:schemeClr val="dk1"/>
-    </dgm:txFillClrLst>
-    <dgm:txEffectClrLst/>
-  </dgm:styleLbl>
-  <dgm:styleLbl name="revTx">
-    <dgm:fillClrLst meth="repeat">
-      <a:schemeClr val="lt1">
-        <a:alpha val="0"/>
-      </a:schemeClr>
-    </dgm:fillClrLst>
-    <dgm:linClrLst meth="repeat">
-      <a:schemeClr val="dk1">
-        <a:alpha val="0"/>
-      </a:schemeClr>
-    </dgm:linClrLst>
-    <dgm:effectClrLst/>
-    <dgm:txLinClrLst/>
-    <dgm:txFillClrLst meth="repeat">
-      <a:schemeClr val="tx1"/>
-    </dgm:txFillClrLst>
-    <dgm:txEffectClrLst/>
-  </dgm:styleLbl>
-</dgm:colorsDef>
-</file>
-
-<file path=ppt/diagrams/colors2.xml><?xml version="1.0" encoding="utf-8"?>
 <dgm:colorsDef xmlns:dgm="http://schemas.openxmlformats.org/drawingml/2006/diagram" xmlns:a="http://schemas.openxmlformats.org/drawingml/2006/main" uniqueId="urn:microsoft.com/office/officeart/2005/8/colors/accent1_2#14">
   <dgm:title val=""/>
   <dgm:desc val=""/>
@@ -1837,248 +1091,6 @@
 </dgm:dataModel>
 </file>
 
-<file path=ppt/diagrams/data2.xml><?xml version="1.0" encoding="utf-8"?>
-<dgm:dataModel xmlns:dgm="http://schemas.openxmlformats.org/drawingml/2006/diagram" xmlns:a="http://schemas.openxmlformats.org/drawingml/2006/main">
-  <dgm:ptLst>
-    <dgm:pt modelId="{B269C909-304D-4F81-8FDB-3178BF38C213}" type="doc">
-      <dgm:prSet loTypeId="urn:microsoft.com/office/officeart/2005/8/layout/vList2" loCatId="list" qsTypeId="urn:microsoft.com/office/officeart/2005/8/quickstyle/simple1#14" qsCatId="simple" csTypeId="urn:microsoft.com/office/officeart/2005/8/colors/accent1_2#14" csCatId="accent1" phldr="1"/>
-      <dgm:spPr/>
-      <dgm:t>
-        <a:bodyPr/>
-        <a:lstStyle/>
-        <a:p>
-          <a:endParaRPr lang="en-US"/>
-        </a:p>
-      </dgm:t>
-    </dgm:pt>
-    <dgm:pt modelId="{70577AC2-4940-4CA8-8010-DAB98AEA02AB}">
-      <dgm:prSet custT="1"/>
-      <dgm:spPr/>
-      <dgm:t>
-        <a:bodyPr/>
-        <a:lstStyle/>
-        <a:p>
-          <a:r>
-            <a:rPr lang="en-GB" sz="2400" dirty="0"/>
-            <a:t>1. Only 50.9% of high availability homes/</a:t>
-          </a:r>
-          <a:r>
-            <a:rPr lang="en-GB" sz="2400" dirty="0" err="1"/>
-            <a:t>apts</a:t>
-          </a:r>
-          <a:r>
-            <a:rPr lang="en-GB" sz="2400" dirty="0"/>
-            <a:t> are above the median so the price dose not effect availability that much. </a:t>
-          </a:r>
-          <a:endParaRPr lang="en-US" sz="2400" dirty="0"/>
-        </a:p>
-      </dgm:t>
-    </dgm:pt>
-    <dgm:pt modelId="{23351F93-F2C8-4891-A98B-D46032D49CB8}" type="parTrans" cxnId="{EFDC13F9-43EB-47B9-B98C-CFC60EBC98E6}">
-      <dgm:prSet/>
-      <dgm:spPr/>
-      <dgm:t>
-        <a:bodyPr/>
-        <a:lstStyle/>
-        <a:p>
-          <a:endParaRPr lang="en-US"/>
-        </a:p>
-      </dgm:t>
-    </dgm:pt>
-    <dgm:pt modelId="{AEBF6319-CCDA-4304-A217-33AE9262D249}" type="sibTrans" cxnId="{EFDC13F9-43EB-47B9-B98C-CFC60EBC98E6}">
-      <dgm:prSet/>
-      <dgm:spPr/>
-      <dgm:t>
-        <a:bodyPr/>
-        <a:lstStyle/>
-        <a:p>
-          <a:endParaRPr lang="en-US"/>
-        </a:p>
-      </dgm:t>
-    </dgm:pt>
-    <dgm:pt modelId="{5BEC1BE5-1DC2-4989-BE3E-CF225A168513}">
-      <dgm:prSet custT="1"/>
-      <dgm:spPr/>
-      <dgm:t>
-        <a:bodyPr/>
-        <a:lstStyle/>
-        <a:p>
-          <a:r>
-            <a:rPr lang="en-GB" sz="2400" dirty="0"/>
-            <a:t>2. The average review score of high availability homes/</a:t>
-          </a:r>
-          <a:r>
-            <a:rPr lang="en-GB" sz="2400" dirty="0" err="1"/>
-            <a:t>apts</a:t>
-          </a:r>
-          <a:r>
-            <a:rPr lang="en-GB" sz="2400" dirty="0"/>
-            <a:t> is 4.82 and the average review score for all homes/</a:t>
-          </a:r>
-          <a:r>
-            <a:rPr lang="en-GB" sz="2400" dirty="0" err="1"/>
-            <a:t>apts</a:t>
-          </a:r>
-          <a:r>
-            <a:rPr lang="en-GB" sz="2400" dirty="0"/>
-            <a:t> is 4.85. The difference is not large so the review score do not effect availability.</a:t>
-          </a:r>
-          <a:endParaRPr lang="en-US" sz="2400" dirty="0"/>
-        </a:p>
-      </dgm:t>
-    </dgm:pt>
-    <dgm:pt modelId="{4CC0DD6E-E403-4769-81C9-A9944E013D59}" type="parTrans" cxnId="{4D2C85E8-B249-484F-AE2B-6344535BFE24}">
-      <dgm:prSet/>
-      <dgm:spPr/>
-      <dgm:t>
-        <a:bodyPr/>
-        <a:lstStyle/>
-        <a:p>
-          <a:endParaRPr lang="en-US"/>
-        </a:p>
-      </dgm:t>
-    </dgm:pt>
-    <dgm:pt modelId="{C5793730-7E43-4E9E-9A25-531D1F91F44F}" type="sibTrans" cxnId="{4D2C85E8-B249-484F-AE2B-6344535BFE24}">
-      <dgm:prSet/>
-      <dgm:spPr/>
-      <dgm:t>
-        <a:bodyPr/>
-        <a:lstStyle/>
-        <a:p>
-          <a:endParaRPr lang="en-US"/>
-        </a:p>
-      </dgm:t>
-    </dgm:pt>
-    <dgm:pt modelId="{55A0715D-1D08-499D-ADCB-DF93C9ED60A6}">
-      <dgm:prSet custT="1"/>
-      <dgm:spPr/>
-      <dgm:t>
-        <a:bodyPr/>
-        <a:lstStyle/>
-        <a:p>
-          <a:r>
-            <a:rPr lang="en-GB" sz="2400" dirty="0"/>
-            <a:t>3. Rent home/</a:t>
-          </a:r>
-          <a:r>
-            <a:rPr lang="en-GB" sz="2400" dirty="0" err="1"/>
-            <a:t>apts</a:t>
-          </a:r>
-          <a:r>
-            <a:rPr lang="en-GB" sz="2400" dirty="0"/>
-            <a:t> in </a:t>
-          </a:r>
-          <a:r>
-            <a:rPr lang="en-GB" sz="2400"/>
-            <a:t>regions with lower </a:t>
-          </a:r>
-          <a:r>
-            <a:rPr lang="en-GB" sz="2400" dirty="0"/>
-            <a:t>high availability homes/</a:t>
-          </a:r>
-          <a:r>
-            <a:rPr lang="en-GB" sz="2400" dirty="0" err="1"/>
-            <a:t>apts</a:t>
-          </a:r>
-          <a:r>
-            <a:rPr lang="en-GB" sz="2400" dirty="0"/>
-            <a:t> percentage.</a:t>
-          </a:r>
-          <a:endParaRPr lang="en-US" sz="2400" dirty="0"/>
-        </a:p>
-      </dgm:t>
-    </dgm:pt>
-    <dgm:pt modelId="{CAB86D5B-51A4-4CDF-AF3D-522F1EDF9C1D}" type="parTrans" cxnId="{89AEBB12-FAE7-4A81-9A06-2AB65C4F5672}">
-      <dgm:prSet/>
-      <dgm:spPr/>
-      <dgm:t>
-        <a:bodyPr/>
-        <a:lstStyle/>
-        <a:p>
-          <a:endParaRPr lang="en-US"/>
-        </a:p>
-      </dgm:t>
-    </dgm:pt>
-    <dgm:pt modelId="{6666C8A0-BEAF-4226-B51E-F488083B2CD5}" type="sibTrans" cxnId="{89AEBB12-FAE7-4A81-9A06-2AB65C4F5672}">
-      <dgm:prSet/>
-      <dgm:spPr/>
-      <dgm:t>
-        <a:bodyPr/>
-        <a:lstStyle/>
-        <a:p>
-          <a:endParaRPr lang="en-US"/>
-        </a:p>
-      </dgm:t>
-    </dgm:pt>
-    <dgm:pt modelId="{613715BF-7B5A-4851-A941-AB3C22085CD8}" type="pres">
-      <dgm:prSet presAssocID="{B269C909-304D-4F81-8FDB-3178BF38C213}" presName="linear" presStyleCnt="0">
-        <dgm:presLayoutVars>
-          <dgm:animLvl val="lvl"/>
-          <dgm:resizeHandles val="exact"/>
-        </dgm:presLayoutVars>
-      </dgm:prSet>
-      <dgm:spPr/>
-    </dgm:pt>
-    <dgm:pt modelId="{783CF24A-6C52-4EF9-878A-C526616E2B62}" type="pres">
-      <dgm:prSet presAssocID="{70577AC2-4940-4CA8-8010-DAB98AEA02AB}" presName="parentText" presStyleLbl="node1" presStyleIdx="0" presStyleCnt="3">
-        <dgm:presLayoutVars>
-          <dgm:chMax val="0"/>
-          <dgm:bulletEnabled val="1"/>
-        </dgm:presLayoutVars>
-      </dgm:prSet>
-      <dgm:spPr/>
-    </dgm:pt>
-    <dgm:pt modelId="{CA99ECA3-BD96-47EA-840A-E3C12390C73E}" type="pres">
-      <dgm:prSet presAssocID="{AEBF6319-CCDA-4304-A217-33AE9262D249}" presName="spacer" presStyleCnt="0"/>
-      <dgm:spPr/>
-    </dgm:pt>
-    <dgm:pt modelId="{4F6C75F2-B0C0-4372-8784-F7B20E05862F}" type="pres">
-      <dgm:prSet presAssocID="{5BEC1BE5-1DC2-4989-BE3E-CF225A168513}" presName="parentText" presStyleLbl="node1" presStyleIdx="1" presStyleCnt="3" custLinFactNeighborY="-77229">
-        <dgm:presLayoutVars>
-          <dgm:chMax val="0"/>
-          <dgm:bulletEnabled val="1"/>
-        </dgm:presLayoutVars>
-      </dgm:prSet>
-      <dgm:spPr/>
-    </dgm:pt>
-    <dgm:pt modelId="{DA761AE2-9AD5-48AD-90F3-884EA9CD10EF}" type="pres">
-      <dgm:prSet presAssocID="{C5793730-7E43-4E9E-9A25-531D1F91F44F}" presName="spacer" presStyleCnt="0"/>
-      <dgm:spPr/>
-    </dgm:pt>
-    <dgm:pt modelId="{737660C4-E570-4908-9CF2-EC32C4559D57}" type="pres">
-      <dgm:prSet presAssocID="{55A0715D-1D08-499D-ADCB-DF93C9ED60A6}" presName="parentText" presStyleLbl="node1" presStyleIdx="2" presStyleCnt="3" custLinFactY="-2644" custLinFactNeighborY="-100000">
-        <dgm:presLayoutVars>
-          <dgm:chMax val="0"/>
-          <dgm:bulletEnabled val="1"/>
-        </dgm:presLayoutVars>
-      </dgm:prSet>
-      <dgm:spPr/>
-    </dgm:pt>
-  </dgm:ptLst>
-  <dgm:cxnLst>
-    <dgm:cxn modelId="{89AEBB12-FAE7-4A81-9A06-2AB65C4F5672}" srcId="{B269C909-304D-4F81-8FDB-3178BF38C213}" destId="{55A0715D-1D08-499D-ADCB-DF93C9ED60A6}" srcOrd="2" destOrd="0" parTransId="{CAB86D5B-51A4-4CDF-AF3D-522F1EDF9C1D}" sibTransId="{6666C8A0-BEAF-4226-B51E-F488083B2CD5}"/>
-    <dgm:cxn modelId="{20D82B2A-2D3F-4229-B19F-6A32339B4A98}" type="presOf" srcId="{55A0715D-1D08-499D-ADCB-DF93C9ED60A6}" destId="{737660C4-E570-4908-9CF2-EC32C4559D57}" srcOrd="0" destOrd="0" presId="urn:microsoft.com/office/officeart/2005/8/layout/vList2"/>
-    <dgm:cxn modelId="{D5D7364F-B935-4D3E-A1EA-E152F9046070}" type="presOf" srcId="{B269C909-304D-4F81-8FDB-3178BF38C213}" destId="{613715BF-7B5A-4851-A941-AB3C22085CD8}" srcOrd="0" destOrd="0" presId="urn:microsoft.com/office/officeart/2005/8/layout/vList2"/>
-    <dgm:cxn modelId="{91FD2AC9-61F2-4CC7-9E4C-E38BDCEAFCF2}" type="presOf" srcId="{5BEC1BE5-1DC2-4989-BE3E-CF225A168513}" destId="{4F6C75F2-B0C0-4372-8784-F7B20E05862F}" srcOrd="0" destOrd="0" presId="urn:microsoft.com/office/officeart/2005/8/layout/vList2"/>
-    <dgm:cxn modelId="{BE8FC3D5-BE46-4347-8F6E-762F5614906B}" type="presOf" srcId="{70577AC2-4940-4CA8-8010-DAB98AEA02AB}" destId="{783CF24A-6C52-4EF9-878A-C526616E2B62}" srcOrd="0" destOrd="0" presId="urn:microsoft.com/office/officeart/2005/8/layout/vList2"/>
-    <dgm:cxn modelId="{4D2C85E8-B249-484F-AE2B-6344535BFE24}" srcId="{B269C909-304D-4F81-8FDB-3178BF38C213}" destId="{5BEC1BE5-1DC2-4989-BE3E-CF225A168513}" srcOrd="1" destOrd="0" parTransId="{4CC0DD6E-E403-4769-81C9-A9944E013D59}" sibTransId="{C5793730-7E43-4E9E-9A25-531D1F91F44F}"/>
-    <dgm:cxn modelId="{EFDC13F9-43EB-47B9-B98C-CFC60EBC98E6}" srcId="{B269C909-304D-4F81-8FDB-3178BF38C213}" destId="{70577AC2-4940-4CA8-8010-DAB98AEA02AB}" srcOrd="0" destOrd="0" parTransId="{23351F93-F2C8-4891-A98B-D46032D49CB8}" sibTransId="{AEBF6319-CCDA-4304-A217-33AE9262D249}"/>
-    <dgm:cxn modelId="{FB3B4D36-23B9-4059-B706-5B99B5672547}" type="presParOf" srcId="{613715BF-7B5A-4851-A941-AB3C22085CD8}" destId="{783CF24A-6C52-4EF9-878A-C526616E2B62}" srcOrd="0" destOrd="0" presId="urn:microsoft.com/office/officeart/2005/8/layout/vList2"/>
-    <dgm:cxn modelId="{2FD55EAC-AC47-4375-8D3B-767AE18936C6}" type="presParOf" srcId="{613715BF-7B5A-4851-A941-AB3C22085CD8}" destId="{CA99ECA3-BD96-47EA-840A-E3C12390C73E}" srcOrd="1" destOrd="0" presId="urn:microsoft.com/office/officeart/2005/8/layout/vList2"/>
-    <dgm:cxn modelId="{729E91A3-5B95-4E49-935C-565D639BA661}" type="presParOf" srcId="{613715BF-7B5A-4851-A941-AB3C22085CD8}" destId="{4F6C75F2-B0C0-4372-8784-F7B20E05862F}" srcOrd="2" destOrd="0" presId="urn:microsoft.com/office/officeart/2005/8/layout/vList2"/>
-    <dgm:cxn modelId="{7D91E0D4-47E8-4A9D-833C-F02BF5B9E8F5}" type="presParOf" srcId="{613715BF-7B5A-4851-A941-AB3C22085CD8}" destId="{DA761AE2-9AD5-48AD-90F3-884EA9CD10EF}" srcOrd="3" destOrd="0" presId="urn:microsoft.com/office/officeart/2005/8/layout/vList2"/>
-    <dgm:cxn modelId="{E1F9D91F-27D2-4A90-B2BE-A3BBDD112C47}" type="presParOf" srcId="{613715BF-7B5A-4851-A941-AB3C22085CD8}" destId="{737660C4-E570-4908-9CF2-EC32C4559D57}" srcOrd="4" destOrd="0" presId="urn:microsoft.com/office/officeart/2005/8/layout/vList2"/>
-  </dgm:cxnLst>
-  <dgm:bg/>
-  <dgm:whole/>
-  <dgm:extLst>
-    <a:ext uri="http://schemas.microsoft.com/office/drawing/2008/diagram">
-      <dsp:dataModelExt xmlns:dsp="http://schemas.microsoft.com/office/drawing/2008/diagram" relId="rId6" minVer="http://schemas.openxmlformats.org/drawingml/2006/diagram"/>
-    </a:ext>
-  </dgm:extLst>
-</dgm:dataModel>
-</file>
-
 <file path=ppt/diagrams/drawing1.xml><?xml version="1.0" encoding="utf-8"?>
 <dsp:drawing xmlns:dgm="http://schemas.openxmlformats.org/drawingml/2006/diagram" xmlns:dsp="http://schemas.microsoft.com/office/drawing/2008/diagram" xmlns:a="http://schemas.openxmlformats.org/drawingml/2006/main">
   <dsp:spTree>
@@ -2360,303 +1372,6 @@
 </dsp:drawing>
 </file>
 
-<file path=ppt/diagrams/drawing2.xml><?xml version="1.0" encoding="utf-8"?>
-<dsp:drawing xmlns:dgm="http://schemas.openxmlformats.org/drawingml/2006/diagram" xmlns:dsp="http://schemas.microsoft.com/office/drawing/2008/diagram" xmlns:a="http://schemas.openxmlformats.org/drawingml/2006/main">
-  <dsp:spTree>
-    <dsp:nvGrpSpPr>
-      <dsp:cNvPr id="0" name=""/>
-      <dsp:cNvGrpSpPr/>
-    </dsp:nvGrpSpPr>
-    <dsp:grpSpPr/>
-    <dsp:sp modelId="{783CF24A-6C52-4EF9-878A-C526616E2B62}">
-      <dsp:nvSpPr>
-        <dsp:cNvPr id="0" name=""/>
-        <dsp:cNvSpPr/>
-      </dsp:nvSpPr>
-      <dsp:spPr>
-        <a:xfrm>
-          <a:off x="0" y="8208"/>
-          <a:ext cx="11803508" cy="1339284"/>
-        </a:xfrm>
-        <a:prstGeom prst="roundRect">
-          <a:avLst/>
-        </a:prstGeom>
-        <a:solidFill>
-          <a:schemeClr val="accent1">
-            <a:hueOff val="0"/>
-            <a:satOff val="0"/>
-            <a:lumOff val="0"/>
-            <a:alphaOff val="0"/>
-          </a:schemeClr>
-        </a:solidFill>
-        <a:ln w="19050" cap="flat" cmpd="sng" algn="ctr">
-          <a:solidFill>
-            <a:schemeClr val="lt1">
-              <a:hueOff val="0"/>
-              <a:satOff val="0"/>
-              <a:lumOff val="0"/>
-              <a:alphaOff val="0"/>
-            </a:schemeClr>
-          </a:solidFill>
-          <a:prstDash val="solid"/>
-          <a:miter lim="800000"/>
-        </a:ln>
-        <a:effectLst/>
-      </dsp:spPr>
-      <dsp:style>
-        <a:lnRef idx="2">
-          <a:scrgbClr r="0" g="0" b="0"/>
-        </a:lnRef>
-        <a:fillRef idx="1">
-          <a:scrgbClr r="0" g="0" b="0"/>
-        </a:fillRef>
-        <a:effectRef idx="0">
-          <a:scrgbClr r="0" g="0" b="0"/>
-        </a:effectRef>
-        <a:fontRef idx="minor">
-          <a:schemeClr val="lt1"/>
-        </a:fontRef>
-      </dsp:style>
-      <dsp:txBody>
-        <a:bodyPr spcFirstLastPara="0" vert="horz" wrap="square" lIns="91440" tIns="91440" rIns="91440" bIns="91440" numCol="1" spcCol="1270" anchor="ctr" anchorCtr="0">
-          <a:noAutofit/>
-        </a:bodyPr>
-        <a:lstStyle/>
-        <a:p>
-          <a:pPr marL="0" lvl="0" indent="0" algn="l" defTabSz="1066800">
-            <a:lnSpc>
-              <a:spcPct val="90000"/>
-            </a:lnSpc>
-            <a:spcBef>
-              <a:spcPct val="0"/>
-            </a:spcBef>
-            <a:spcAft>
-              <a:spcPct val="35000"/>
-            </a:spcAft>
-            <a:buNone/>
-          </a:pPr>
-          <a:r>
-            <a:rPr lang="en-GB" sz="2400" kern="1200" dirty="0"/>
-            <a:t>1. Only 50.9% of high availability homes/</a:t>
-          </a:r>
-          <a:r>
-            <a:rPr lang="en-GB" sz="2400" kern="1200" dirty="0" err="1"/>
-            <a:t>apts</a:t>
-          </a:r>
-          <a:r>
-            <a:rPr lang="en-GB" sz="2400" kern="1200" dirty="0"/>
-            <a:t> are above the median so the price dose not effect availability that much. </a:t>
-          </a:r>
-          <a:endParaRPr lang="en-US" sz="2400" kern="1200" dirty="0"/>
-        </a:p>
-      </dsp:txBody>
-      <dsp:txXfrm>
-        <a:off x="65378" y="73586"/>
-        <a:ext cx="11672752" cy="1208528"/>
-      </dsp:txXfrm>
-    </dsp:sp>
-    <dsp:sp modelId="{4F6C75F2-B0C0-4372-8784-F7B20E05862F}">
-      <dsp:nvSpPr>
-        <dsp:cNvPr id="0" name=""/>
-        <dsp:cNvSpPr/>
-      </dsp:nvSpPr>
-      <dsp:spPr>
-        <a:xfrm>
-          <a:off x="0" y="1371757"/>
-          <a:ext cx="11803508" cy="1339284"/>
-        </a:xfrm>
-        <a:prstGeom prst="roundRect">
-          <a:avLst/>
-        </a:prstGeom>
-        <a:solidFill>
-          <a:schemeClr val="accent1">
-            <a:hueOff val="0"/>
-            <a:satOff val="0"/>
-            <a:lumOff val="0"/>
-            <a:alphaOff val="0"/>
-          </a:schemeClr>
-        </a:solidFill>
-        <a:ln w="19050" cap="flat" cmpd="sng" algn="ctr">
-          <a:solidFill>
-            <a:schemeClr val="lt1">
-              <a:hueOff val="0"/>
-              <a:satOff val="0"/>
-              <a:lumOff val="0"/>
-              <a:alphaOff val="0"/>
-            </a:schemeClr>
-          </a:solidFill>
-          <a:prstDash val="solid"/>
-          <a:miter lim="800000"/>
-        </a:ln>
-        <a:effectLst/>
-      </dsp:spPr>
-      <dsp:style>
-        <a:lnRef idx="2">
-          <a:scrgbClr r="0" g="0" b="0"/>
-        </a:lnRef>
-        <a:fillRef idx="1">
-          <a:scrgbClr r="0" g="0" b="0"/>
-        </a:fillRef>
-        <a:effectRef idx="0">
-          <a:scrgbClr r="0" g="0" b="0"/>
-        </a:effectRef>
-        <a:fontRef idx="minor">
-          <a:schemeClr val="lt1"/>
-        </a:fontRef>
-      </dsp:style>
-      <dsp:txBody>
-        <a:bodyPr spcFirstLastPara="0" vert="horz" wrap="square" lIns="91440" tIns="91440" rIns="91440" bIns="91440" numCol="1" spcCol="1270" anchor="ctr" anchorCtr="0">
-          <a:noAutofit/>
-        </a:bodyPr>
-        <a:lstStyle/>
-        <a:p>
-          <a:pPr marL="0" lvl="0" indent="0" algn="l" defTabSz="1066800">
-            <a:lnSpc>
-              <a:spcPct val="90000"/>
-            </a:lnSpc>
-            <a:spcBef>
-              <a:spcPct val="0"/>
-            </a:spcBef>
-            <a:spcAft>
-              <a:spcPct val="35000"/>
-            </a:spcAft>
-            <a:buNone/>
-          </a:pPr>
-          <a:r>
-            <a:rPr lang="en-GB" sz="2400" kern="1200" dirty="0"/>
-            <a:t>2. The average review score of high availability homes/</a:t>
-          </a:r>
-          <a:r>
-            <a:rPr lang="en-GB" sz="2400" kern="1200" dirty="0" err="1"/>
-            <a:t>apts</a:t>
-          </a:r>
-          <a:r>
-            <a:rPr lang="en-GB" sz="2400" kern="1200" dirty="0"/>
-            <a:t> is 4.82 and the average review score for all homes/</a:t>
-          </a:r>
-          <a:r>
-            <a:rPr lang="en-GB" sz="2400" kern="1200" dirty="0" err="1"/>
-            <a:t>apts</a:t>
-          </a:r>
-          <a:r>
-            <a:rPr lang="en-GB" sz="2400" kern="1200" dirty="0"/>
-            <a:t> is 4.85. The difference is not large so the review score do not effect availability.</a:t>
-          </a:r>
-          <a:endParaRPr lang="en-US" sz="2400" kern="1200" dirty="0"/>
-        </a:p>
-      </dsp:txBody>
-      <dsp:txXfrm>
-        <a:off x="65378" y="1437135"/>
-        <a:ext cx="11672752" cy="1208528"/>
-      </dsp:txXfrm>
-    </dsp:sp>
-    <dsp:sp modelId="{737660C4-E570-4908-9CF2-EC32C4559D57}">
-      <dsp:nvSpPr>
-        <dsp:cNvPr id="0" name=""/>
-        <dsp:cNvSpPr/>
-      </dsp:nvSpPr>
-      <dsp:spPr>
-        <a:xfrm>
-          <a:off x="0" y="2757926"/>
-          <a:ext cx="11803508" cy="1339284"/>
-        </a:xfrm>
-        <a:prstGeom prst="roundRect">
-          <a:avLst/>
-        </a:prstGeom>
-        <a:solidFill>
-          <a:schemeClr val="accent1">
-            <a:hueOff val="0"/>
-            <a:satOff val="0"/>
-            <a:lumOff val="0"/>
-            <a:alphaOff val="0"/>
-          </a:schemeClr>
-        </a:solidFill>
-        <a:ln w="19050" cap="flat" cmpd="sng" algn="ctr">
-          <a:solidFill>
-            <a:schemeClr val="lt1">
-              <a:hueOff val="0"/>
-              <a:satOff val="0"/>
-              <a:lumOff val="0"/>
-              <a:alphaOff val="0"/>
-            </a:schemeClr>
-          </a:solidFill>
-          <a:prstDash val="solid"/>
-          <a:miter lim="800000"/>
-        </a:ln>
-        <a:effectLst/>
-      </dsp:spPr>
-      <dsp:style>
-        <a:lnRef idx="2">
-          <a:scrgbClr r="0" g="0" b="0"/>
-        </a:lnRef>
-        <a:fillRef idx="1">
-          <a:scrgbClr r="0" g="0" b="0"/>
-        </a:fillRef>
-        <a:effectRef idx="0">
-          <a:scrgbClr r="0" g="0" b="0"/>
-        </a:effectRef>
-        <a:fontRef idx="minor">
-          <a:schemeClr val="lt1"/>
-        </a:fontRef>
-      </dsp:style>
-      <dsp:txBody>
-        <a:bodyPr spcFirstLastPara="0" vert="horz" wrap="square" lIns="91440" tIns="91440" rIns="91440" bIns="91440" numCol="1" spcCol="1270" anchor="ctr" anchorCtr="0">
-          <a:noAutofit/>
-        </a:bodyPr>
-        <a:lstStyle/>
-        <a:p>
-          <a:pPr marL="0" lvl="0" indent="0" algn="l" defTabSz="1066800">
-            <a:lnSpc>
-              <a:spcPct val="90000"/>
-            </a:lnSpc>
-            <a:spcBef>
-              <a:spcPct val="0"/>
-            </a:spcBef>
-            <a:spcAft>
-              <a:spcPct val="35000"/>
-            </a:spcAft>
-            <a:buNone/>
-          </a:pPr>
-          <a:r>
-            <a:rPr lang="en-GB" sz="2400" kern="1200" dirty="0"/>
-            <a:t>3. Rent home/</a:t>
-          </a:r>
-          <a:r>
-            <a:rPr lang="en-GB" sz="2400" kern="1200" dirty="0" err="1"/>
-            <a:t>apts</a:t>
-          </a:r>
-          <a:r>
-            <a:rPr lang="en-GB" sz="2400" kern="1200" dirty="0"/>
-            <a:t> in </a:t>
-          </a:r>
-          <a:r>
-            <a:rPr lang="en-GB" sz="2400" kern="1200"/>
-            <a:t>regions with lower </a:t>
-          </a:r>
-          <a:r>
-            <a:rPr lang="en-GB" sz="2400" kern="1200" dirty="0"/>
-            <a:t>high availability homes/</a:t>
-          </a:r>
-          <a:r>
-            <a:rPr lang="en-GB" sz="2400" kern="1200" dirty="0" err="1"/>
-            <a:t>apts</a:t>
-          </a:r>
-          <a:r>
-            <a:rPr lang="en-GB" sz="2400" kern="1200" dirty="0"/>
-            <a:t> percentage.</a:t>
-          </a:r>
-          <a:endParaRPr lang="en-US" sz="2400" kern="1200" dirty="0"/>
-        </a:p>
-      </dsp:txBody>
-      <dsp:txXfrm>
-        <a:off x="65378" y="2823304"/>
-        <a:ext cx="11672752" cy="1208528"/>
-      </dsp:txXfrm>
-    </dsp:sp>
-  </dsp:spTree>
-</dsp:drawing>
-</file>
-
 <file path=ppt/diagrams/layout1.xml><?xml version="1.0" encoding="utf-8"?>
 <dgm:layoutDef xmlns:dgm="http://schemas.openxmlformats.org/drawingml/2006/diagram" xmlns:a="http://schemas.openxmlformats.org/drawingml/2006/main" uniqueId="urn:microsoft.com/office/officeart/2005/8/layout/vList2">
   <dgm:title val=""/>
@@ -2824,1208 +1539,7 @@
 </dgm:layoutDef>
 </file>
 
-<file path=ppt/diagrams/layout2.xml><?xml version="1.0" encoding="utf-8"?>
-<dgm:layoutDef xmlns:dgm="http://schemas.openxmlformats.org/drawingml/2006/diagram" xmlns:a="http://schemas.openxmlformats.org/drawingml/2006/main" uniqueId="urn:microsoft.com/office/officeart/2005/8/layout/vList2">
-  <dgm:title val=""/>
-  <dgm:desc val=""/>
-  <dgm:catLst>
-    <dgm:cat type="list" pri="3000"/>
-    <dgm:cat type="convert" pri="1000"/>
-  </dgm:catLst>
-  <dgm:sampData>
-    <dgm:dataModel>
-      <dgm:ptLst>
-        <dgm:pt modelId="0" type="doc"/>
-        <dgm:pt modelId="1">
-          <dgm:prSet phldr="1"/>
-        </dgm:pt>
-        <dgm:pt modelId="11">
-          <dgm:prSet phldr="1"/>
-        </dgm:pt>
-        <dgm:pt modelId="2">
-          <dgm:prSet phldr="1"/>
-        </dgm:pt>
-        <dgm:pt modelId="21">
-          <dgm:prSet phldr="1"/>
-        </dgm:pt>
-      </dgm:ptLst>
-      <dgm:cxnLst>
-        <dgm:cxn modelId="4" srcId="0" destId="1" srcOrd="0" destOrd="0"/>
-        <dgm:cxn modelId="5" srcId="0" destId="2" srcOrd="1" destOrd="0"/>
-        <dgm:cxn modelId="12" srcId="1" destId="11" srcOrd="0" destOrd="0"/>
-        <dgm:cxn modelId="23" srcId="2" destId="21" srcOrd="0" destOrd="0"/>
-      </dgm:cxnLst>
-      <dgm:bg/>
-      <dgm:whole/>
-    </dgm:dataModel>
-  </dgm:sampData>
-  <dgm:styleData>
-    <dgm:dataModel>
-      <dgm:ptLst>
-        <dgm:pt modelId="0" type="doc"/>
-        <dgm:pt modelId="1"/>
-        <dgm:pt modelId="2"/>
-      </dgm:ptLst>
-      <dgm:cxnLst>
-        <dgm:cxn modelId="3" srcId="0" destId="1" srcOrd="0" destOrd="0"/>
-        <dgm:cxn modelId="4" srcId="0" destId="2" srcOrd="1" destOrd="0"/>
-      </dgm:cxnLst>
-      <dgm:bg/>
-      <dgm:whole/>
-    </dgm:dataModel>
-  </dgm:styleData>
-  <dgm:clrData>
-    <dgm:dataModel>
-      <dgm:ptLst>
-        <dgm:pt modelId="0" type="doc"/>
-        <dgm:pt modelId="1"/>
-        <dgm:pt modelId="2"/>
-        <dgm:pt modelId="3"/>
-        <dgm:pt modelId="4"/>
-      </dgm:ptLst>
-      <dgm:cxnLst>
-        <dgm:cxn modelId="5" srcId="0" destId="1" srcOrd="0" destOrd="0"/>
-        <dgm:cxn modelId="6" srcId="0" destId="2" srcOrd="1" destOrd="0"/>
-        <dgm:cxn modelId="7" srcId="0" destId="3" srcOrd="2" destOrd="0"/>
-        <dgm:cxn modelId="8" srcId="0" destId="4" srcOrd="3" destOrd="0"/>
-      </dgm:cxnLst>
-      <dgm:bg/>
-      <dgm:whole/>
-    </dgm:dataModel>
-  </dgm:clrData>
-  <dgm:layoutNode name="linear">
-    <dgm:varLst>
-      <dgm:animLvl val="lvl"/>
-      <dgm:resizeHandles val="exact"/>
-    </dgm:varLst>
-    <dgm:alg type="lin">
-      <dgm:param type="linDir" val="fromT"/>
-      <dgm:param type="vertAlign" val="mid"/>
-    </dgm:alg>
-    <dgm:shape xmlns:r="http://schemas.openxmlformats.org/officeDocument/2006/relationships" r:blip="">
-      <dgm:adjLst/>
-    </dgm:shape>
-    <dgm:presOf/>
-    <dgm:constrLst>
-      <dgm:constr type="w" for="ch" forName="parentText" refType="w"/>
-      <dgm:constr type="h" for="ch" forName="parentText" refType="primFontSz" refFor="ch" refForName="parentText" fact="0.52"/>
-      <dgm:constr type="w" for="ch" forName="childText" refType="w"/>
-      <dgm:constr type="h" for="ch" forName="childText" refType="primFontSz" refFor="ch" refForName="parentText" fact="0.46"/>
-      <dgm:constr type="h" for="ch" forName="parentText" op="equ"/>
-      <dgm:constr type="primFontSz" for="ch" forName="parentText" op="equ" val="65"/>
-      <dgm:constr type="primFontSz" for="ch" forName="childText" refType="primFontSz" refFor="ch" refForName="parentText" op="equ"/>
-      <dgm:constr type="h" for="ch" forName="spacer" refType="primFontSz" refFor="ch" refForName="parentText" fact="0.08"/>
-    </dgm:constrLst>
-    <dgm:ruleLst>
-      <dgm:rule type="primFontSz" for="ch" forName="parentText" val="5" fact="NaN" max="NaN"/>
-    </dgm:ruleLst>
-    <dgm:forEach name="Name0" axis="ch" ptType="node">
-      <dgm:layoutNode name="parentText" styleLbl="node1">
-        <dgm:varLst>
-          <dgm:chMax val="0"/>
-          <dgm:bulletEnabled val="1"/>
-        </dgm:varLst>
-        <dgm:alg type="tx">
-          <dgm:param type="parTxLTRAlign" val="l"/>
-          <dgm:param type="parTxRTLAlign" val="r"/>
-        </dgm:alg>
-        <dgm:shape xmlns:r="http://schemas.openxmlformats.org/officeDocument/2006/relationships" type="roundRect" r:blip="">
-          <dgm:adjLst/>
-        </dgm:shape>
-        <dgm:presOf axis="self"/>
-        <dgm:constrLst>
-          <dgm:constr type="tMarg" refType="primFontSz" fact="0.3"/>
-          <dgm:constr type="bMarg" refType="primFontSz" fact="0.3"/>
-          <dgm:constr type="lMarg" refType="primFontSz" fact="0.3"/>
-          <dgm:constr type="rMarg" refType="primFontSz" fact="0.3"/>
-        </dgm:constrLst>
-        <dgm:ruleLst>
-          <dgm:rule type="h" val="INF" fact="NaN" max="NaN"/>
-        </dgm:ruleLst>
-      </dgm:layoutNode>
-      <dgm:choose name="Name1">
-        <dgm:if name="Name2" axis="ch" ptType="node" func="cnt" op="gte" val="1">
-          <dgm:layoutNode name="childText" styleLbl="revTx">
-            <dgm:varLst>
-              <dgm:bulletEnabled val="1"/>
-            </dgm:varLst>
-            <dgm:alg type="tx">
-              <dgm:param type="stBulletLvl" val="1"/>
-              <dgm:param type="lnSpAfChP" val="20"/>
-            </dgm:alg>
-            <dgm:shape xmlns:r="http://schemas.openxmlformats.org/officeDocument/2006/relationships" type="rect" r:blip="">
-              <dgm:adjLst/>
-            </dgm:shape>
-            <dgm:presOf axis="des" ptType="node"/>
-            <dgm:constrLst>
-              <dgm:constr type="tMarg" refType="primFontSz" fact="0.1"/>
-              <dgm:constr type="bMarg" refType="primFontSz" fact="0.1"/>
-              <dgm:constr type="lMarg" refType="w" fact="0.09"/>
-            </dgm:constrLst>
-            <dgm:ruleLst>
-              <dgm:rule type="h" val="INF" fact="NaN" max="NaN"/>
-            </dgm:ruleLst>
-          </dgm:layoutNode>
-        </dgm:if>
-        <dgm:else name="Name3">
-          <dgm:choose name="Name4">
-            <dgm:if name="Name5" axis="par ch" ptType="doc node" func="cnt" op="gte" val="2">
-              <dgm:forEach name="Name6" axis="followSib" ptType="sibTrans" cnt="1">
-                <dgm:layoutNode name="spacer">
-                  <dgm:alg type="sp"/>
-                  <dgm:shape xmlns:r="http://schemas.openxmlformats.org/officeDocument/2006/relationships" r:blip="">
-                    <dgm:adjLst/>
-                  </dgm:shape>
-                  <dgm:presOf/>
-                  <dgm:constrLst/>
-                  <dgm:ruleLst/>
-                </dgm:layoutNode>
-              </dgm:forEach>
-            </dgm:if>
-            <dgm:else name="Name7"/>
-          </dgm:choose>
-        </dgm:else>
-      </dgm:choose>
-    </dgm:forEach>
-  </dgm:layoutNode>
-</dgm:layoutDef>
-</file>
-
 <file path=ppt/diagrams/quickStyle1.xml><?xml version="1.0" encoding="utf-8"?>
-<dgm:styleDef xmlns:dgm="http://schemas.openxmlformats.org/drawingml/2006/diagram" xmlns:a="http://schemas.openxmlformats.org/drawingml/2006/main" uniqueId="urn:microsoft.com/office/officeart/2005/8/quickstyle/simple1#14">
-  <dgm:title val=""/>
-  <dgm:desc val=""/>
-  <dgm:catLst>
-    <dgm:cat type="simple" pri="10100"/>
-  </dgm:catLst>
-  <dgm:scene3d>
-    <a:camera prst="orthographicFront"/>
-    <a:lightRig rig="threePt" dir="t"/>
-  </dgm:scene3d>
-  <dgm:styleLbl name="node0">
-    <dgm:scene3d>
-      <a:camera prst="orthographicFront"/>
-      <a:lightRig rig="threePt" dir="t"/>
-    </dgm:scene3d>
-    <dgm:sp3d/>
-    <dgm:txPr/>
-    <dgm:style>
-      <a:lnRef idx="2">
-        <a:scrgbClr r="0" g="0" b="0"/>
-      </a:lnRef>
-      <a:fillRef idx="1">
-        <a:scrgbClr r="0" g="0" b="0"/>
-      </a:fillRef>
-      <a:effectRef idx="0">
-        <a:scrgbClr r="0" g="0" b="0"/>
-      </a:effectRef>
-      <a:fontRef idx="minor">
-        <a:schemeClr val="lt1"/>
-      </a:fontRef>
-    </dgm:style>
-  </dgm:styleLbl>
-  <dgm:styleLbl name="lnNode1">
-    <dgm:scene3d>
-      <a:camera prst="orthographicFront"/>
-      <a:lightRig rig="threePt" dir="t"/>
-    </dgm:scene3d>
-    <dgm:sp3d/>
-    <dgm:txPr/>
-    <dgm:style>
-      <a:lnRef idx="2">
-        <a:scrgbClr r="0" g="0" b="0"/>
-      </a:lnRef>
-      <a:fillRef idx="1">
-        <a:scrgbClr r="0" g="0" b="0"/>
-      </a:fillRef>
-      <a:effectRef idx="0">
-        <a:scrgbClr r="0" g="0" b="0"/>
-      </a:effectRef>
-      <a:fontRef idx="minor">
-        <a:schemeClr val="lt1"/>
-      </a:fontRef>
-    </dgm:style>
-  </dgm:styleLbl>
-  <dgm:styleLbl name="vennNode1">
-    <dgm:scene3d>
-      <a:camera prst="orthographicFront"/>
-      <a:lightRig rig="threePt" dir="t"/>
-    </dgm:scene3d>
-    <dgm:sp3d/>
-    <dgm:txPr/>
-    <dgm:style>
-      <a:lnRef idx="2">
-        <a:scrgbClr r="0" g="0" b="0"/>
-      </a:lnRef>
-      <a:fillRef idx="1">
-        <a:scrgbClr r="0" g="0" b="0"/>
-      </a:fillRef>
-      <a:effectRef idx="0">
-        <a:scrgbClr r="0" g="0" b="0"/>
-      </a:effectRef>
-      <a:fontRef idx="minor">
-        <a:schemeClr val="tx1"/>
-      </a:fontRef>
-    </dgm:style>
-  </dgm:styleLbl>
-  <dgm:styleLbl name="alignNode1">
-    <dgm:scene3d>
-      <a:camera prst="orthographicFront"/>
-      <a:lightRig rig="threePt" dir="t"/>
-    </dgm:scene3d>
-    <dgm:sp3d/>
-    <dgm:txPr/>
-    <dgm:style>
-      <a:lnRef idx="2">
-        <a:scrgbClr r="0" g="0" b="0"/>
-      </a:lnRef>
-      <a:fillRef idx="1">
-        <a:scrgbClr r="0" g="0" b="0"/>
-      </a:fillRef>
-      <a:effectRef idx="0">
-        <a:scrgbClr r="0" g="0" b="0"/>
-      </a:effectRef>
-      <a:fontRef idx="minor">
-        <a:schemeClr val="lt1"/>
-      </a:fontRef>
-    </dgm:style>
-  </dgm:styleLbl>
-  <dgm:styleLbl name="node1">
-    <dgm:scene3d>
-      <a:camera prst="orthographicFront"/>
-      <a:lightRig rig="threePt" dir="t"/>
-    </dgm:scene3d>
-    <dgm:sp3d/>
-    <dgm:txPr/>
-    <dgm:style>
-      <a:lnRef idx="2">
-        <a:scrgbClr r="0" g="0" b="0"/>
-      </a:lnRef>
-      <a:fillRef idx="1">
-        <a:scrgbClr r="0" g="0" b="0"/>
-      </a:fillRef>
-      <a:effectRef idx="0">
-        <a:scrgbClr r="0" g="0" b="0"/>
-      </a:effectRef>
-      <a:fontRef idx="minor">
-        <a:schemeClr val="lt1"/>
-      </a:fontRef>
-    </dgm:style>
-  </dgm:styleLbl>
-  <dgm:styleLbl name="node2">
-    <dgm:scene3d>
-      <a:camera prst="orthographicFront"/>
-      <a:lightRig rig="threePt" dir="t"/>
-    </dgm:scene3d>
-    <dgm:sp3d/>
-    <dgm:txPr/>
-    <dgm:style>
-      <a:lnRef idx="2">
-        <a:scrgbClr r="0" g="0" b="0"/>
-      </a:lnRef>
-      <a:fillRef idx="1">
-        <a:scrgbClr r="0" g="0" b="0"/>
-      </a:fillRef>
-      <a:effectRef idx="0">
-        <a:scrgbClr r="0" g="0" b="0"/>
-      </a:effectRef>
-      <a:fontRef idx="minor">
-        <a:schemeClr val="lt1"/>
-      </a:fontRef>
-    </dgm:style>
-  </dgm:styleLbl>
-  <dgm:styleLbl name="node3">
-    <dgm:scene3d>
-      <a:camera prst="orthographicFront"/>
-      <a:lightRig rig="threePt" dir="t"/>
-    </dgm:scene3d>
-    <dgm:sp3d/>
-    <dgm:txPr/>
-    <dgm:style>
-      <a:lnRef idx="2">
-        <a:scrgbClr r="0" g="0" b="0"/>
-      </a:lnRef>
-      <a:fillRef idx="1">
-        <a:scrgbClr r="0" g="0" b="0"/>
-      </a:fillRef>
-      <a:effectRef idx="0">
-        <a:scrgbClr r="0" g="0" b="0"/>
-      </a:effectRef>
-      <a:fontRef idx="minor">
-        <a:schemeClr val="lt1"/>
-      </a:fontRef>
-    </dgm:style>
-  </dgm:styleLbl>
-  <dgm:styleLbl name="node4">
-    <dgm:scene3d>
-      <a:camera prst="orthographicFront"/>
-      <a:lightRig rig="threePt" dir="t"/>
-    </dgm:scene3d>
-    <dgm:sp3d/>
-    <dgm:txPr/>
-    <dgm:style>
-      <a:lnRef idx="2">
-        <a:scrgbClr r="0" g="0" b="0"/>
-      </a:lnRef>
-      <a:fillRef idx="1">
-        <a:scrgbClr r="0" g="0" b="0"/>
-      </a:fillRef>
-      <a:effectRef idx="0">
-        <a:scrgbClr r="0" g="0" b="0"/>
-      </a:effectRef>
-      <a:fontRef idx="minor">
-        <a:schemeClr val="lt1"/>
-      </a:fontRef>
-    </dgm:style>
-  </dgm:styleLbl>
-  <dgm:styleLbl name="fgImgPlace1">
-    <dgm:scene3d>
-      <a:camera prst="orthographicFront"/>
-      <a:lightRig rig="threePt" dir="t"/>
-    </dgm:scene3d>
-    <dgm:sp3d/>
-    <dgm:txPr/>
-    <dgm:style>
-      <a:lnRef idx="2">
-        <a:scrgbClr r="0" g="0" b="0"/>
-      </a:lnRef>
-      <a:fillRef idx="1">
-        <a:scrgbClr r="0" g="0" b="0"/>
-      </a:fillRef>
-      <a:effectRef idx="0">
-        <a:scrgbClr r="0" g="0" b="0"/>
-      </a:effectRef>
-      <a:fontRef idx="minor"/>
-    </dgm:style>
-  </dgm:styleLbl>
-  <dgm:styleLbl name="alignImgPlace1">
-    <dgm:scene3d>
-      <a:camera prst="orthographicFront"/>
-      <a:lightRig rig="threePt" dir="t"/>
-    </dgm:scene3d>
-    <dgm:sp3d/>
-    <dgm:txPr/>
-    <dgm:style>
-      <a:lnRef idx="2">
-        <a:scrgbClr r="0" g="0" b="0"/>
-      </a:lnRef>
-      <a:fillRef idx="1">
-        <a:scrgbClr r="0" g="0" b="0"/>
-      </a:fillRef>
-      <a:effectRef idx="0">
-        <a:scrgbClr r="0" g="0" b="0"/>
-      </a:effectRef>
-      <a:fontRef idx="minor"/>
-    </dgm:style>
-  </dgm:styleLbl>
-  <dgm:styleLbl name="bgImgPlace1">
-    <dgm:scene3d>
-      <a:camera prst="orthographicFront"/>
-      <a:lightRig rig="threePt" dir="t"/>
-    </dgm:scene3d>
-    <dgm:sp3d/>
-    <dgm:txPr/>
-    <dgm:style>
-      <a:lnRef idx="2">
-        <a:scrgbClr r="0" g="0" b="0"/>
-      </a:lnRef>
-      <a:fillRef idx="1">
-        <a:scrgbClr r="0" g="0" b="0"/>
-      </a:fillRef>
-      <a:effectRef idx="0">
-        <a:scrgbClr r="0" g="0" b="0"/>
-      </a:effectRef>
-      <a:fontRef idx="minor"/>
-    </dgm:style>
-  </dgm:styleLbl>
-  <dgm:styleLbl name="sibTrans2D1">
-    <dgm:scene3d>
-      <a:camera prst="orthographicFront"/>
-      <a:lightRig rig="threePt" dir="t"/>
-    </dgm:scene3d>
-    <dgm:sp3d/>
-    <dgm:txPr/>
-    <dgm:style>
-      <a:lnRef idx="0">
-        <a:scrgbClr r="0" g="0" b="0"/>
-      </a:lnRef>
-      <a:fillRef idx="1">
-        <a:scrgbClr r="0" g="0" b="0"/>
-      </a:fillRef>
-      <a:effectRef idx="0">
-        <a:scrgbClr r="0" g="0" b="0"/>
-      </a:effectRef>
-      <a:fontRef idx="minor">
-        <a:schemeClr val="lt1"/>
-      </a:fontRef>
-    </dgm:style>
-  </dgm:styleLbl>
-  <dgm:styleLbl name="fgSibTrans2D1">
-    <dgm:scene3d>
-      <a:camera prst="orthographicFront"/>
-      <a:lightRig rig="threePt" dir="t"/>
-    </dgm:scene3d>
-    <dgm:sp3d/>
-    <dgm:txPr/>
-    <dgm:style>
-      <a:lnRef idx="0">
-        <a:scrgbClr r="0" g="0" b="0"/>
-      </a:lnRef>
-      <a:fillRef idx="1">
-        <a:scrgbClr r="0" g="0" b="0"/>
-      </a:fillRef>
-      <a:effectRef idx="0">
-        <a:scrgbClr r="0" g="0" b="0"/>
-      </a:effectRef>
-      <a:fontRef idx="minor">
-        <a:schemeClr val="lt1"/>
-      </a:fontRef>
-    </dgm:style>
-  </dgm:styleLbl>
-  <dgm:styleLbl name="bgSibTrans2D1">
-    <dgm:scene3d>
-      <a:camera prst="orthographicFront"/>
-      <a:lightRig rig="threePt" dir="t"/>
-    </dgm:scene3d>
-    <dgm:sp3d/>
-    <dgm:txPr/>
-    <dgm:style>
-      <a:lnRef idx="0">
-        <a:scrgbClr r="0" g="0" b="0"/>
-      </a:lnRef>
-      <a:fillRef idx="1">
-        <a:scrgbClr r="0" g="0" b="0"/>
-      </a:fillRef>
-      <a:effectRef idx="0">
-        <a:scrgbClr r="0" g="0" b="0"/>
-      </a:effectRef>
-      <a:fontRef idx="minor">
-        <a:schemeClr val="lt1"/>
-      </a:fontRef>
-    </dgm:style>
-  </dgm:styleLbl>
-  <dgm:styleLbl name="sibTrans1D1">
-    <dgm:scene3d>
-      <a:camera prst="orthographicFront"/>
-      <a:lightRig rig="threePt" dir="t"/>
-    </dgm:scene3d>
-    <dgm:sp3d/>
-    <dgm:txPr/>
-    <dgm:style>
-      <a:lnRef idx="1">
-        <a:scrgbClr r="0" g="0" b="0"/>
-      </a:lnRef>
-      <a:fillRef idx="0">
-        <a:scrgbClr r="0" g="0" b="0"/>
-      </a:fillRef>
-      <a:effectRef idx="0">
-        <a:scrgbClr r="0" g="0" b="0"/>
-      </a:effectRef>
-      <a:fontRef idx="minor"/>
-    </dgm:style>
-  </dgm:styleLbl>
-  <dgm:styleLbl name="callout">
-    <dgm:scene3d>
-      <a:camera prst="orthographicFront"/>
-      <a:lightRig rig="threePt" dir="t"/>
-    </dgm:scene3d>
-    <dgm:sp3d/>
-    <dgm:txPr/>
-    <dgm:style>
-      <a:lnRef idx="2">
-        <a:scrgbClr r="0" g="0" b="0"/>
-      </a:lnRef>
-      <a:fillRef idx="1">
-        <a:scrgbClr r="0" g="0" b="0"/>
-      </a:fillRef>
-      <a:effectRef idx="0">
-        <a:scrgbClr r="0" g="0" b="0"/>
-      </a:effectRef>
-      <a:fontRef idx="minor"/>
-    </dgm:style>
-  </dgm:styleLbl>
-  <dgm:styleLbl name="asst0">
-    <dgm:scene3d>
-      <a:camera prst="orthographicFront"/>
-      <a:lightRig rig="threePt" dir="t"/>
-    </dgm:scene3d>
-    <dgm:sp3d/>
-    <dgm:txPr/>
-    <dgm:style>
-      <a:lnRef idx="2">
-        <a:scrgbClr r="0" g="0" b="0"/>
-      </a:lnRef>
-      <a:fillRef idx="1">
-        <a:scrgbClr r="0" g="0" b="0"/>
-      </a:fillRef>
-      <a:effectRef idx="0">
-        <a:scrgbClr r="0" g="0" b="0"/>
-      </a:effectRef>
-      <a:fontRef idx="minor">
-        <a:schemeClr val="lt1"/>
-      </a:fontRef>
-    </dgm:style>
-  </dgm:styleLbl>
-  <dgm:styleLbl name="asst1">
-    <dgm:scene3d>
-      <a:camera prst="orthographicFront"/>
-      <a:lightRig rig="threePt" dir="t"/>
-    </dgm:scene3d>
-    <dgm:sp3d/>
-    <dgm:txPr/>
-    <dgm:style>
-      <a:lnRef idx="2">
-        <a:scrgbClr r="0" g="0" b="0"/>
-      </a:lnRef>
-      <a:fillRef idx="1">
-        <a:scrgbClr r="0" g="0" b="0"/>
-      </a:fillRef>
-      <a:effectRef idx="0">
-        <a:scrgbClr r="0" g="0" b="0"/>
-      </a:effectRef>
-      <a:fontRef idx="minor">
-        <a:schemeClr val="lt1"/>
-      </a:fontRef>
-    </dgm:style>
-  </dgm:styleLbl>
-  <dgm:styleLbl name="asst2">
-    <dgm:scene3d>
-      <a:camera prst="orthographicFront"/>
-      <a:lightRig rig="threePt" dir="t"/>
-    </dgm:scene3d>
-    <dgm:sp3d/>
-    <dgm:txPr/>
-    <dgm:style>
-      <a:lnRef idx="2">
-        <a:scrgbClr r="0" g="0" b="0"/>
-      </a:lnRef>
-      <a:fillRef idx="1">
-        <a:scrgbClr r="0" g="0" b="0"/>
-      </a:fillRef>
-      <a:effectRef idx="0">
-        <a:scrgbClr r="0" g="0" b="0"/>
-      </a:effectRef>
-      <a:fontRef idx="minor">
-        <a:schemeClr val="lt1"/>
-      </a:fontRef>
-    </dgm:style>
-  </dgm:styleLbl>
-  <dgm:styleLbl name="asst3">
-    <dgm:scene3d>
-      <a:camera prst="orthographicFront"/>
-      <a:lightRig rig="threePt" dir="t"/>
-    </dgm:scene3d>
-    <dgm:sp3d/>
-    <dgm:txPr/>
-    <dgm:style>
-      <a:lnRef idx="2">
-        <a:scrgbClr r="0" g="0" b="0"/>
-      </a:lnRef>
-      <a:fillRef idx="1">
-        <a:scrgbClr r="0" g="0" b="0"/>
-      </a:fillRef>
-      <a:effectRef idx="0">
-        <a:scrgbClr r="0" g="0" b="0"/>
-      </a:effectRef>
-      <a:fontRef idx="minor">
-        <a:schemeClr val="lt1"/>
-      </a:fontRef>
-    </dgm:style>
-  </dgm:styleLbl>
-  <dgm:styleLbl name="asst4">
-    <dgm:scene3d>
-      <a:camera prst="orthographicFront"/>
-      <a:lightRig rig="threePt" dir="t"/>
-    </dgm:scene3d>
-    <dgm:sp3d/>
-    <dgm:txPr/>
-    <dgm:style>
-      <a:lnRef idx="2">
-        <a:scrgbClr r="0" g="0" b="0"/>
-      </a:lnRef>
-      <a:fillRef idx="1">
-        <a:scrgbClr r="0" g="0" b="0"/>
-      </a:fillRef>
-      <a:effectRef idx="0">
-        <a:scrgbClr r="0" g="0" b="0"/>
-      </a:effectRef>
-      <a:fontRef idx="minor">
-        <a:schemeClr val="lt1"/>
-      </a:fontRef>
-    </dgm:style>
-  </dgm:styleLbl>
-  <dgm:styleLbl name="parChTrans2D1">
-    <dgm:scene3d>
-      <a:camera prst="orthographicFront"/>
-      <a:lightRig rig="threePt" dir="t"/>
-    </dgm:scene3d>
-    <dgm:sp3d/>
-    <dgm:txPr/>
-    <dgm:style>
-      <a:lnRef idx="2">
-        <a:scrgbClr r="0" g="0" b="0"/>
-      </a:lnRef>
-      <a:fillRef idx="1">
-        <a:scrgbClr r="0" g="0" b="0"/>
-      </a:fillRef>
-      <a:effectRef idx="0">
-        <a:scrgbClr r="0" g="0" b="0"/>
-      </a:effectRef>
-      <a:fontRef idx="minor">
-        <a:schemeClr val="lt1"/>
-      </a:fontRef>
-    </dgm:style>
-  </dgm:styleLbl>
-  <dgm:styleLbl name="parChTrans2D2">
-    <dgm:scene3d>
-      <a:camera prst="orthographicFront"/>
-      <a:lightRig rig="threePt" dir="t"/>
-    </dgm:scene3d>
-    <dgm:sp3d/>
-    <dgm:txPr/>
-    <dgm:style>
-      <a:lnRef idx="2">
-        <a:scrgbClr r="0" g="0" b="0"/>
-      </a:lnRef>
-      <a:fillRef idx="1">
-        <a:scrgbClr r="0" g="0" b="0"/>
-      </a:fillRef>
-      <a:effectRef idx="0">
-        <a:scrgbClr r="0" g="0" b="0"/>
-      </a:effectRef>
-      <a:fontRef idx="minor">
-        <a:schemeClr val="lt1"/>
-      </a:fontRef>
-    </dgm:style>
-  </dgm:styleLbl>
-  <dgm:styleLbl name="parChTrans2D3">
-    <dgm:scene3d>
-      <a:camera prst="orthographicFront"/>
-      <a:lightRig rig="threePt" dir="t"/>
-    </dgm:scene3d>
-    <dgm:sp3d/>
-    <dgm:txPr/>
-    <dgm:style>
-      <a:lnRef idx="2">
-        <a:scrgbClr r="0" g="0" b="0"/>
-      </a:lnRef>
-      <a:fillRef idx="1">
-        <a:scrgbClr r="0" g="0" b="0"/>
-      </a:fillRef>
-      <a:effectRef idx="0">
-        <a:scrgbClr r="0" g="0" b="0"/>
-      </a:effectRef>
-      <a:fontRef idx="minor">
-        <a:schemeClr val="lt1"/>
-      </a:fontRef>
-    </dgm:style>
-  </dgm:styleLbl>
-  <dgm:styleLbl name="parChTrans2D4">
-    <dgm:scene3d>
-      <a:camera prst="orthographicFront"/>
-      <a:lightRig rig="threePt" dir="t"/>
-    </dgm:scene3d>
-    <dgm:sp3d/>
-    <dgm:txPr/>
-    <dgm:style>
-      <a:lnRef idx="2">
-        <a:scrgbClr r="0" g="0" b="0"/>
-      </a:lnRef>
-      <a:fillRef idx="1">
-        <a:scrgbClr r="0" g="0" b="0"/>
-      </a:fillRef>
-      <a:effectRef idx="0">
-        <a:scrgbClr r="0" g="0" b="0"/>
-      </a:effectRef>
-      <a:fontRef idx="minor">
-        <a:schemeClr val="lt1"/>
-      </a:fontRef>
-    </dgm:style>
-  </dgm:styleLbl>
-  <dgm:styleLbl name="parChTrans1D1">
-    <dgm:scene3d>
-      <a:camera prst="orthographicFront"/>
-      <a:lightRig rig="threePt" dir="t"/>
-    </dgm:scene3d>
-    <dgm:sp3d/>
-    <dgm:txPr/>
-    <dgm:style>
-      <a:lnRef idx="2">
-        <a:scrgbClr r="0" g="0" b="0"/>
-      </a:lnRef>
-      <a:fillRef idx="0">
-        <a:scrgbClr r="0" g="0" b="0"/>
-      </a:fillRef>
-      <a:effectRef idx="0">
-        <a:scrgbClr r="0" g="0" b="0"/>
-      </a:effectRef>
-      <a:fontRef idx="minor"/>
-    </dgm:style>
-  </dgm:styleLbl>
-  <dgm:styleLbl name="parChTrans1D2">
-    <dgm:scene3d>
-      <a:camera prst="orthographicFront"/>
-      <a:lightRig rig="threePt" dir="t"/>
-    </dgm:scene3d>
-    <dgm:sp3d/>
-    <dgm:txPr/>
-    <dgm:style>
-      <a:lnRef idx="2">
-        <a:scrgbClr r="0" g="0" b="0"/>
-      </a:lnRef>
-      <a:fillRef idx="0">
-        <a:scrgbClr r="0" g="0" b="0"/>
-      </a:fillRef>
-      <a:effectRef idx="0">
-        <a:scrgbClr r="0" g="0" b="0"/>
-      </a:effectRef>
-      <a:fontRef idx="minor"/>
-    </dgm:style>
-  </dgm:styleLbl>
-  <dgm:styleLbl name="parChTrans1D3">
-    <dgm:scene3d>
-      <a:camera prst="orthographicFront"/>
-      <a:lightRig rig="threePt" dir="t"/>
-    </dgm:scene3d>
-    <dgm:sp3d/>
-    <dgm:txPr/>
-    <dgm:style>
-      <a:lnRef idx="2">
-        <a:scrgbClr r="0" g="0" b="0"/>
-      </a:lnRef>
-      <a:fillRef idx="0">
-        <a:scrgbClr r="0" g="0" b="0"/>
-      </a:fillRef>
-      <a:effectRef idx="0">
-        <a:scrgbClr r="0" g="0" b="0"/>
-      </a:effectRef>
-      <a:fontRef idx="minor"/>
-    </dgm:style>
-  </dgm:styleLbl>
-  <dgm:styleLbl name="parChTrans1D4">
-    <dgm:scene3d>
-      <a:camera prst="orthographicFront"/>
-      <a:lightRig rig="threePt" dir="t"/>
-    </dgm:scene3d>
-    <dgm:sp3d/>
-    <dgm:txPr/>
-    <dgm:style>
-      <a:lnRef idx="2">
-        <a:scrgbClr r="0" g="0" b="0"/>
-      </a:lnRef>
-      <a:fillRef idx="0">
-        <a:scrgbClr r="0" g="0" b="0"/>
-      </a:fillRef>
-      <a:effectRef idx="0">
-        <a:scrgbClr r="0" g="0" b="0"/>
-      </a:effectRef>
-      <a:fontRef idx="minor"/>
-    </dgm:style>
-  </dgm:styleLbl>
-  <dgm:styleLbl name="fgAcc1">
-    <dgm:scene3d>
-      <a:camera prst="orthographicFront"/>
-      <a:lightRig rig="threePt" dir="t"/>
-    </dgm:scene3d>
-    <dgm:sp3d/>
-    <dgm:txPr/>
-    <dgm:style>
-      <a:lnRef idx="2">
-        <a:scrgbClr r="0" g="0" b="0"/>
-      </a:lnRef>
-      <a:fillRef idx="1">
-        <a:scrgbClr r="0" g="0" b="0"/>
-      </a:fillRef>
-      <a:effectRef idx="0">
-        <a:scrgbClr r="0" g="0" b="0"/>
-      </a:effectRef>
-      <a:fontRef idx="minor"/>
-    </dgm:style>
-  </dgm:styleLbl>
-  <dgm:styleLbl name="conFgAcc1">
-    <dgm:scene3d>
-      <a:camera prst="orthographicFront"/>
-      <a:lightRig rig="threePt" dir="t"/>
-    </dgm:scene3d>
-    <dgm:sp3d/>
-    <dgm:txPr/>
-    <dgm:style>
-      <a:lnRef idx="2">
-        <a:scrgbClr r="0" g="0" b="0"/>
-      </a:lnRef>
-      <a:fillRef idx="1">
-        <a:scrgbClr r="0" g="0" b="0"/>
-      </a:fillRef>
-      <a:effectRef idx="0">
-        <a:scrgbClr r="0" g="0" b="0"/>
-      </a:effectRef>
-      <a:fontRef idx="minor"/>
-    </dgm:style>
-  </dgm:styleLbl>
-  <dgm:styleLbl name="alignAcc1">
-    <dgm:scene3d>
-      <a:camera prst="orthographicFront"/>
-      <a:lightRig rig="threePt" dir="t"/>
-    </dgm:scene3d>
-    <dgm:sp3d/>
-    <dgm:txPr/>
-    <dgm:style>
-      <a:lnRef idx="2">
-        <a:scrgbClr r="0" g="0" b="0"/>
-      </a:lnRef>
-      <a:fillRef idx="1">
-        <a:scrgbClr r="0" g="0" b="0"/>
-      </a:fillRef>
-      <a:effectRef idx="0">
-        <a:scrgbClr r="0" g="0" b="0"/>
-      </a:effectRef>
-      <a:fontRef idx="minor"/>
-    </dgm:style>
-  </dgm:styleLbl>
-  <dgm:styleLbl name="trAlignAcc1">
-    <dgm:scene3d>
-      <a:camera prst="orthographicFront"/>
-      <a:lightRig rig="threePt" dir="t"/>
-    </dgm:scene3d>
-    <dgm:sp3d/>
-    <dgm:txPr/>
-    <dgm:style>
-      <a:lnRef idx="1">
-        <a:scrgbClr r="0" g="0" b="0"/>
-      </a:lnRef>
-      <a:fillRef idx="1">
-        <a:scrgbClr r="0" g="0" b="0"/>
-      </a:fillRef>
-      <a:effectRef idx="0">
-        <a:scrgbClr r="0" g="0" b="0"/>
-      </a:effectRef>
-      <a:fontRef idx="minor"/>
-    </dgm:style>
-  </dgm:styleLbl>
-  <dgm:styleLbl name="bgAcc1">
-    <dgm:scene3d>
-      <a:camera prst="orthographicFront"/>
-      <a:lightRig rig="threePt" dir="t"/>
-    </dgm:scene3d>
-    <dgm:sp3d/>
-    <dgm:txPr/>
-    <dgm:style>
-      <a:lnRef idx="2">
-        <a:scrgbClr r="0" g="0" b="0"/>
-      </a:lnRef>
-      <a:fillRef idx="1">
-        <a:scrgbClr r="0" g="0" b="0"/>
-      </a:fillRef>
-      <a:effectRef idx="0">
-        <a:scrgbClr r="0" g="0" b="0"/>
-      </a:effectRef>
-      <a:fontRef idx="minor"/>
-    </dgm:style>
-  </dgm:styleLbl>
-  <dgm:styleLbl name="solidFgAcc1">
-    <dgm:scene3d>
-      <a:camera prst="orthographicFront"/>
-      <a:lightRig rig="threePt" dir="t"/>
-    </dgm:scene3d>
-    <dgm:sp3d/>
-    <dgm:txPr/>
-    <dgm:style>
-      <a:lnRef idx="2">
-        <a:scrgbClr r="0" g="0" b="0"/>
-      </a:lnRef>
-      <a:fillRef idx="1">
-        <a:scrgbClr r="0" g="0" b="0"/>
-      </a:fillRef>
-      <a:effectRef idx="0">
-        <a:scrgbClr r="0" g="0" b="0"/>
-      </a:effectRef>
-      <a:fontRef idx="minor"/>
-    </dgm:style>
-  </dgm:styleLbl>
-  <dgm:styleLbl name="solidAlignAcc1">
-    <dgm:scene3d>
-      <a:camera prst="orthographicFront"/>
-      <a:lightRig rig="threePt" dir="t"/>
-    </dgm:scene3d>
-    <dgm:sp3d/>
-    <dgm:txPr/>
-    <dgm:style>
-      <a:lnRef idx="2">
-        <a:scrgbClr r="0" g="0" b="0"/>
-      </a:lnRef>
-      <a:fillRef idx="1">
-        <a:scrgbClr r="0" g="0" b="0"/>
-      </a:fillRef>
-      <a:effectRef idx="0">
-        <a:scrgbClr r="0" g="0" b="0"/>
-      </a:effectRef>
-      <a:fontRef idx="minor"/>
-    </dgm:style>
-  </dgm:styleLbl>
-  <dgm:styleLbl name="solidBgAcc1">
-    <dgm:scene3d>
-      <a:camera prst="orthographicFront"/>
-      <a:lightRig rig="threePt" dir="t"/>
-    </dgm:scene3d>
-    <dgm:sp3d/>
-    <dgm:txPr/>
-    <dgm:style>
-      <a:lnRef idx="2">
-        <a:scrgbClr r="0" g="0" b="0"/>
-      </a:lnRef>
-      <a:fillRef idx="1">
-        <a:scrgbClr r="0" g="0" b="0"/>
-      </a:fillRef>
-      <a:effectRef idx="0">
-        <a:scrgbClr r="0" g="0" b="0"/>
-      </a:effectRef>
-      <a:fontRef idx="minor"/>
-    </dgm:style>
-  </dgm:styleLbl>
-  <dgm:styleLbl name="fgAccFollowNode1">
-    <dgm:scene3d>
-      <a:camera prst="orthographicFront"/>
-      <a:lightRig rig="threePt" dir="t"/>
-    </dgm:scene3d>
-    <dgm:sp3d/>
-    <dgm:txPr/>
-    <dgm:style>
-      <a:lnRef idx="2">
-        <a:scrgbClr r="0" g="0" b="0"/>
-      </a:lnRef>
-      <a:fillRef idx="1">
-        <a:scrgbClr r="0" g="0" b="0"/>
-      </a:fillRef>
-      <a:effectRef idx="0">
-        <a:scrgbClr r="0" g="0" b="0"/>
-      </a:effectRef>
-      <a:fontRef idx="minor"/>
-    </dgm:style>
-  </dgm:styleLbl>
-  <dgm:styleLbl name="alignAccFollowNode1">
-    <dgm:scene3d>
-      <a:camera prst="orthographicFront"/>
-      <a:lightRig rig="threePt" dir="t"/>
-    </dgm:scene3d>
-    <dgm:sp3d/>
-    <dgm:txPr/>
-    <dgm:style>
-      <a:lnRef idx="2">
-        <a:scrgbClr r="0" g="0" b="0"/>
-      </a:lnRef>
-      <a:fillRef idx="1">
-        <a:scrgbClr r="0" g="0" b="0"/>
-      </a:fillRef>
-      <a:effectRef idx="0">
-        <a:scrgbClr r="0" g="0" b="0"/>
-      </a:effectRef>
-      <a:fontRef idx="minor"/>
-    </dgm:style>
-  </dgm:styleLbl>
-  <dgm:styleLbl name="bgAccFollowNode1">
-    <dgm:scene3d>
-      <a:camera prst="orthographicFront"/>
-      <a:lightRig rig="threePt" dir="t"/>
-    </dgm:scene3d>
-    <dgm:sp3d/>
-    <dgm:txPr/>
-    <dgm:style>
-      <a:lnRef idx="2">
-        <a:scrgbClr r="0" g="0" b="0"/>
-      </a:lnRef>
-      <a:fillRef idx="1">
-        <a:scrgbClr r="0" g="0" b="0"/>
-      </a:fillRef>
-      <a:effectRef idx="0">
-        <a:scrgbClr r="0" g="0" b="0"/>
-      </a:effectRef>
-      <a:fontRef idx="minor"/>
-    </dgm:style>
-  </dgm:styleLbl>
-  <dgm:styleLbl name="fgAcc0">
-    <dgm:scene3d>
-      <a:camera prst="orthographicFront"/>
-      <a:lightRig rig="threePt" dir="t"/>
-    </dgm:scene3d>
-    <dgm:sp3d/>
-    <dgm:txPr/>
-    <dgm:style>
-      <a:lnRef idx="2">
-        <a:scrgbClr r="0" g="0" b="0"/>
-      </a:lnRef>
-      <a:fillRef idx="1">
-        <a:scrgbClr r="0" g="0" b="0"/>
-      </a:fillRef>
-      <a:effectRef idx="0">
-        <a:scrgbClr r="0" g="0" b="0"/>
-      </a:effectRef>
-      <a:fontRef idx="minor"/>
-    </dgm:style>
-  </dgm:styleLbl>
-  <dgm:styleLbl name="fgAcc2">
-    <dgm:scene3d>
-      <a:camera prst="orthographicFront"/>
-      <a:lightRig rig="threePt" dir="t"/>
-    </dgm:scene3d>
-    <dgm:sp3d/>
-    <dgm:txPr/>
-    <dgm:style>
-      <a:lnRef idx="2">
-        <a:scrgbClr r="0" g="0" b="0"/>
-      </a:lnRef>
-      <a:fillRef idx="1">
-        <a:scrgbClr r="0" g="0" b="0"/>
-      </a:fillRef>
-      <a:effectRef idx="0">
-        <a:scrgbClr r="0" g="0" b="0"/>
-      </a:effectRef>
-      <a:fontRef idx="minor"/>
-    </dgm:style>
-  </dgm:styleLbl>
-  <dgm:styleLbl name="fgAcc3">
-    <dgm:scene3d>
-      <a:camera prst="orthographicFront"/>
-      <a:lightRig rig="threePt" dir="t"/>
-    </dgm:scene3d>
-    <dgm:sp3d/>
-    <dgm:txPr/>
-    <dgm:style>
-      <a:lnRef idx="2">
-        <a:scrgbClr r="0" g="0" b="0"/>
-      </a:lnRef>
-      <a:fillRef idx="1">
-        <a:scrgbClr r="0" g="0" b="0"/>
-      </a:fillRef>
-      <a:effectRef idx="0">
-        <a:scrgbClr r="0" g="0" b="0"/>
-      </a:effectRef>
-      <a:fontRef idx="minor"/>
-    </dgm:style>
-  </dgm:styleLbl>
-  <dgm:styleLbl name="fgAcc4">
-    <dgm:scene3d>
-      <a:camera prst="orthographicFront"/>
-      <a:lightRig rig="threePt" dir="t"/>
-    </dgm:scene3d>
-    <dgm:sp3d/>
-    <dgm:txPr/>
-    <dgm:style>
-      <a:lnRef idx="2">
-        <a:scrgbClr r="0" g="0" b="0"/>
-      </a:lnRef>
-      <a:fillRef idx="1">
-        <a:scrgbClr r="0" g="0" b="0"/>
-      </a:fillRef>
-      <a:effectRef idx="0">
-        <a:scrgbClr r="0" g="0" b="0"/>
-      </a:effectRef>
-      <a:fontRef idx="minor"/>
-    </dgm:style>
-  </dgm:styleLbl>
-  <dgm:styleLbl name="bgShp">
-    <dgm:scene3d>
-      <a:camera prst="orthographicFront"/>
-      <a:lightRig rig="threePt" dir="t"/>
-    </dgm:scene3d>
-    <dgm:sp3d/>
-    <dgm:txPr/>
-    <dgm:style>
-      <a:lnRef idx="0">
-        <a:scrgbClr r="0" g="0" b="0"/>
-      </a:lnRef>
-      <a:fillRef idx="1">
-        <a:scrgbClr r="0" g="0" b="0"/>
-      </a:fillRef>
-      <a:effectRef idx="0">
-        <a:scrgbClr r="0" g="0" b="0"/>
-      </a:effectRef>
-      <a:fontRef idx="minor"/>
-    </dgm:style>
-  </dgm:styleLbl>
-  <dgm:styleLbl name="dkBgShp">
-    <dgm:scene3d>
-      <a:camera prst="orthographicFront"/>
-      <a:lightRig rig="threePt" dir="t"/>
-    </dgm:scene3d>
-    <dgm:sp3d/>
-    <dgm:txPr/>
-    <dgm:style>
-      <a:lnRef idx="0">
-        <a:scrgbClr r="0" g="0" b="0"/>
-      </a:lnRef>
-      <a:fillRef idx="1">
-        <a:scrgbClr r="0" g="0" b="0"/>
-      </a:fillRef>
-      <a:effectRef idx="0">
-        <a:scrgbClr r="0" g="0" b="0"/>
-      </a:effectRef>
-      <a:fontRef idx="minor"/>
-    </dgm:style>
-  </dgm:styleLbl>
-  <dgm:styleLbl name="trBgShp">
-    <dgm:scene3d>
-      <a:camera prst="orthographicFront"/>
-      <a:lightRig rig="threePt" dir="t"/>
-    </dgm:scene3d>
-    <dgm:sp3d/>
-    <dgm:txPr/>
-    <dgm:style>
-      <a:lnRef idx="0">
-        <a:scrgbClr r="0" g="0" b="0"/>
-      </a:lnRef>
-      <a:fillRef idx="1">
-        <a:scrgbClr r="0" g="0" b="0"/>
-      </a:fillRef>
-      <a:effectRef idx="0">
-        <a:scrgbClr r="0" g="0" b="0"/>
-      </a:effectRef>
-      <a:fontRef idx="minor"/>
-    </dgm:style>
-  </dgm:styleLbl>
-  <dgm:styleLbl name="fgShp">
-    <dgm:scene3d>
-      <a:camera prst="orthographicFront"/>
-      <a:lightRig rig="threePt" dir="t"/>
-    </dgm:scene3d>
-    <dgm:sp3d/>
-    <dgm:txPr/>
-    <dgm:style>
-      <a:lnRef idx="2">
-        <a:scrgbClr r="0" g="0" b="0"/>
-      </a:lnRef>
-      <a:fillRef idx="1">
-        <a:scrgbClr r="0" g="0" b="0"/>
-      </a:fillRef>
-      <a:effectRef idx="0">
-        <a:scrgbClr r="0" g="0" b="0"/>
-      </a:effectRef>
-      <a:fontRef idx="minor"/>
-    </dgm:style>
-  </dgm:styleLbl>
-  <dgm:styleLbl name="revTx">
-    <dgm:scene3d>
-      <a:camera prst="orthographicFront"/>
-      <a:lightRig rig="threePt" dir="t"/>
-    </dgm:scene3d>
-    <dgm:sp3d/>
-    <dgm:txPr/>
-    <dgm:style>
-      <a:lnRef idx="0">
-        <a:scrgbClr r="0" g="0" b="0"/>
-      </a:lnRef>
-      <a:fillRef idx="0">
-        <a:scrgbClr r="0" g="0" b="0"/>
-      </a:fillRef>
-      <a:effectRef idx="0">
-        <a:scrgbClr r="0" g="0" b="0"/>
-      </a:effectRef>
-      <a:fontRef idx="minor"/>
-    </dgm:style>
-  </dgm:styleLbl>
-</dgm:styleDef>
-</file>
-
-<file path=ppt/diagrams/quickStyle2.xml><?xml version="1.0" encoding="utf-8"?>
 <dgm:styleDef xmlns:dgm="http://schemas.openxmlformats.org/drawingml/2006/diagram" xmlns:a="http://schemas.openxmlformats.org/drawingml/2006/main" uniqueId="urn:microsoft.com/office/officeart/2005/8/quickstyle/simple1#14">
   <dgm:title val=""/>
   <dgm:desc val=""/>
@@ -9700,6 +7214,14 @@
 <file path=ppt/slides/slide4.xml><?xml version="1.0" encoding="utf-8"?>
 <p:sld xmlns:a="http://schemas.openxmlformats.org/drawingml/2006/main" xmlns:r="http://schemas.openxmlformats.org/officeDocument/2006/relationships" xmlns:p="http://schemas.openxmlformats.org/presentationml/2006/main">
   <p:cSld>
+    <p:bg>
+      <p:bgPr>
+        <a:solidFill>
+          <a:schemeClr val="bg1"/>
+        </a:solidFill>
+        <a:effectLst/>
+      </p:bgPr>
+    </p:bg>
     <p:spTree>
       <p:nvGrpSpPr>
         <p:cNvPr id="1" name=""/>
@@ -9714,6 +7236,384 @@
           <a:chExt cx="0" cy="0"/>
         </a:xfrm>
       </p:grpSpPr>
+      <p:sp useBgFill="1">
+        <p:nvSpPr>
+          <p:cNvPr id="16" name="Rectangle 15">
+            <a:extLst>
+              <a:ext uri="{FF2B5EF4-FFF2-40B4-BE49-F238E27FC236}">
+                <a16:creationId xmlns:a16="http://schemas.microsoft.com/office/drawing/2014/main" id="{2151139A-886F-4B97-8815-729AD3831BBD}"/>
+              </a:ext>
+              <a:ext uri="{C183D7F6-B498-43B3-948B-1728B52AA6E4}">
+                <adec:decorative xmlns:adec="http://schemas.microsoft.com/office/drawing/2017/decorative" val="1"/>
+              </a:ext>
+            </a:extLst>
+          </p:cNvPr>
+          <p:cNvSpPr>
+            <a:spLocks noGrp="1" noRot="1" noChangeAspect="1" noMove="1" noResize="1" noEditPoints="1" noAdjustHandles="1" noChangeArrowheads="1" noChangeShapeType="1" noTextEdit="1"/>
+          </p:cNvSpPr>
+          <p:nvPr>
+            <p:extLst>
+              <p:ext uri="{386F3935-93C4-4BCD-93E2-E3B085C9AB24}">
+                <p16:designElem xmlns:p16="http://schemas.microsoft.com/office/powerpoint/2015/main" val="1"/>
+              </p:ext>
+            </p:extLst>
+          </p:nvPr>
+        </p:nvSpPr>
+        <p:spPr>
+          <a:xfrm>
+            <a:off x="0" y="0"/>
+            <a:ext cx="12192000" cy="6858000"/>
+          </a:xfrm>
+          <a:prstGeom prst="rect">
+            <a:avLst/>
+          </a:prstGeom>
+          <a:ln w="12700" cap="flat" cmpd="sng" algn="ctr">
+            <a:noFill/>
+            <a:prstDash val="solid"/>
+            <a:miter lim="800000"/>
+          </a:ln>
+          <a:effectLst/>
+          <a:extLst>
+            <a:ext uri="{91240B29-F687-4F45-9708-019B960494DF}">
+              <a14:hiddenLine xmlns:a14="http://schemas.microsoft.com/office/drawing/2010/main" w="12700" cap="flat" cmpd="sng" algn="ctr">
+                <a:solidFill>
+                  <a:schemeClr val="accent1">
+                    <a:shade val="50000"/>
+                  </a:schemeClr>
+                </a:solidFill>
+                <a:prstDash val="solid"/>
+                <a:miter lim="800000"/>
+              </a14:hiddenLine>
+            </a:ext>
+          </a:extLst>
+        </p:spPr>
+        <p:style>
+          <a:lnRef idx="2">
+            <a:schemeClr val="accent1">
+              <a:shade val="50000"/>
+            </a:schemeClr>
+          </a:lnRef>
+          <a:fillRef idx="1">
+            <a:schemeClr val="accent1"/>
+          </a:fillRef>
+          <a:effectRef idx="0">
+            <a:schemeClr val="accent1"/>
+          </a:effectRef>
+          <a:fontRef idx="minor">
+            <a:schemeClr val="lt1"/>
+          </a:fontRef>
+        </p:style>
+        <p:txBody>
+          <a:bodyPr rtlCol="0" anchor="ctr"/>
+          <a:lstStyle/>
+          <a:p>
+            <a:pPr algn="ctr"/>
+            <a:endParaRPr lang="en-US" sz="2000"/>
+          </a:p>
+        </p:txBody>
+      </p:sp>
+      <p:sp>
+        <p:nvSpPr>
+          <p:cNvPr id="18" name="Rectangle 17">
+            <a:extLst>
+              <a:ext uri="{FF2B5EF4-FFF2-40B4-BE49-F238E27FC236}">
+                <a16:creationId xmlns:a16="http://schemas.microsoft.com/office/drawing/2014/main" id="{AB5E08C4-8CDD-4623-A5B8-E998C6DEE3B7}"/>
+              </a:ext>
+              <a:ext uri="{C183D7F6-B498-43B3-948B-1728B52AA6E4}">
+                <adec:decorative xmlns:adec="http://schemas.microsoft.com/office/drawing/2017/decorative" val="1"/>
+              </a:ext>
+            </a:extLst>
+          </p:cNvPr>
+          <p:cNvSpPr>
+            <a:spLocks noGrp="1" noRot="1" noChangeAspect="1" noMove="1" noResize="1" noEditPoints="1" noAdjustHandles="1" noChangeArrowheads="1" noChangeShapeType="1" noTextEdit="1"/>
+          </p:cNvSpPr>
+          <p:nvPr>
+            <p:extLst>
+              <p:ext uri="{386F3935-93C4-4BCD-93E2-E3B085C9AB24}">
+                <p16:designElem xmlns:p16="http://schemas.microsoft.com/office/powerpoint/2015/main" val="1"/>
+              </p:ext>
+            </p:extLst>
+          </p:nvPr>
+        </p:nvSpPr>
+        <p:spPr>
+          <a:xfrm flipH="1">
+            <a:off x="2" y="492"/>
+            <a:ext cx="12191998" cy="1575955"/>
+          </a:xfrm>
+          <a:prstGeom prst="rect">
+            <a:avLst/>
+          </a:prstGeom>
+          <a:gradFill>
+            <a:gsLst>
+              <a:gs pos="0">
+                <a:schemeClr val="accent1">
+                  <a:lumMod val="50000"/>
+                </a:schemeClr>
+              </a:gs>
+              <a:gs pos="100000">
+                <a:schemeClr val="accent1">
+                  <a:lumMod val="75000"/>
+                </a:schemeClr>
+              </a:gs>
+            </a:gsLst>
+            <a:lin ang="8400000" scaled="0"/>
+          </a:gradFill>
+          <a:ln>
+            <a:noFill/>
+          </a:ln>
+        </p:spPr>
+        <p:style>
+          <a:lnRef idx="2">
+            <a:schemeClr val="accent1">
+              <a:shade val="50000"/>
+            </a:schemeClr>
+          </a:lnRef>
+          <a:fillRef idx="1">
+            <a:schemeClr val="accent1"/>
+          </a:fillRef>
+          <a:effectRef idx="0">
+            <a:schemeClr val="accent1"/>
+          </a:effectRef>
+          <a:fontRef idx="minor">
+            <a:schemeClr val="lt1"/>
+          </a:fontRef>
+        </p:style>
+        <p:txBody>
+          <a:bodyPr rtlCol="0" anchor="ctr"/>
+          <a:lstStyle/>
+          <a:p>
+            <a:pPr algn="ctr"/>
+            <a:endParaRPr lang="en-US"/>
+          </a:p>
+        </p:txBody>
+      </p:sp>
+      <p:sp>
+        <p:nvSpPr>
+          <p:cNvPr id="20" name="Rectangle 19">
+            <a:extLst>
+              <a:ext uri="{FF2B5EF4-FFF2-40B4-BE49-F238E27FC236}">
+                <a16:creationId xmlns:a16="http://schemas.microsoft.com/office/drawing/2014/main" id="{15F33878-D502-4FFA-8ACE-F2AECDB2A23F}"/>
+              </a:ext>
+              <a:ext uri="{C183D7F6-B498-43B3-948B-1728B52AA6E4}">
+                <adec:decorative xmlns:adec="http://schemas.microsoft.com/office/drawing/2017/decorative" val="1"/>
+              </a:ext>
+            </a:extLst>
+          </p:cNvPr>
+          <p:cNvSpPr>
+            <a:spLocks noGrp="1" noRot="1" noChangeAspect="1" noMove="1" noResize="1" noEditPoints="1" noAdjustHandles="1" noChangeArrowheads="1" noChangeShapeType="1" noTextEdit="1"/>
+          </p:cNvSpPr>
+          <p:nvPr>
+            <p:extLst>
+              <p:ext uri="{386F3935-93C4-4BCD-93E2-E3B085C9AB24}">
+                <p16:designElem xmlns:p16="http://schemas.microsoft.com/office/powerpoint/2015/main" val="1"/>
+              </p:ext>
+            </p:extLst>
+          </p:nvPr>
+        </p:nvSpPr>
+        <p:spPr>
+          <a:xfrm rot="10800000" flipH="1">
+            <a:off x="8128857" y="35"/>
+            <a:ext cx="4063143" cy="1576412"/>
+          </a:xfrm>
+          <a:prstGeom prst="rect">
+            <a:avLst/>
+          </a:prstGeom>
+          <a:gradFill>
+            <a:gsLst>
+              <a:gs pos="19000">
+                <a:schemeClr val="accent1">
+                  <a:lumMod val="50000"/>
+                  <a:alpha val="68000"/>
+                </a:schemeClr>
+              </a:gs>
+              <a:gs pos="100000">
+                <a:schemeClr val="accent1">
+                  <a:alpha val="79000"/>
+                </a:schemeClr>
+              </a:gs>
+            </a:gsLst>
+            <a:lin ang="19200000" scaled="0"/>
+          </a:gradFill>
+          <a:ln>
+            <a:noFill/>
+          </a:ln>
+        </p:spPr>
+        <p:style>
+          <a:lnRef idx="2">
+            <a:schemeClr val="accent1">
+              <a:shade val="50000"/>
+            </a:schemeClr>
+          </a:lnRef>
+          <a:fillRef idx="1">
+            <a:schemeClr val="accent1"/>
+          </a:fillRef>
+          <a:effectRef idx="0">
+            <a:schemeClr val="accent1"/>
+          </a:effectRef>
+          <a:fontRef idx="minor">
+            <a:schemeClr val="lt1"/>
+          </a:fontRef>
+        </p:style>
+        <p:txBody>
+          <a:bodyPr rtlCol="0" anchor="ctr"/>
+          <a:lstStyle/>
+          <a:p>
+            <a:pPr algn="ctr"/>
+            <a:endParaRPr lang="en-US"/>
+          </a:p>
+        </p:txBody>
+      </p:sp>
+      <p:sp>
+        <p:nvSpPr>
+          <p:cNvPr id="22" name="Rectangle 21">
+            <a:extLst>
+              <a:ext uri="{FF2B5EF4-FFF2-40B4-BE49-F238E27FC236}">
+                <a16:creationId xmlns:a16="http://schemas.microsoft.com/office/drawing/2014/main" id="{D3539FEE-81D3-4406-802E-60B20B16F4F6}"/>
+              </a:ext>
+              <a:ext uri="{C183D7F6-B498-43B3-948B-1728B52AA6E4}">
+                <adec:decorative xmlns:adec="http://schemas.microsoft.com/office/drawing/2017/decorative" val="1"/>
+              </a:ext>
+            </a:extLst>
+          </p:cNvPr>
+          <p:cNvSpPr>
+            <a:spLocks noGrp="1" noRot="1" noChangeAspect="1" noMove="1" noResize="1" noEditPoints="1" noAdjustHandles="1" noChangeArrowheads="1" noChangeShapeType="1" noTextEdit="1"/>
+          </p:cNvSpPr>
+          <p:nvPr>
+            <p:extLst>
+              <p:ext uri="{386F3935-93C4-4BCD-93E2-E3B085C9AB24}">
+                <p16:designElem xmlns:p16="http://schemas.microsoft.com/office/powerpoint/2015/main" val="1"/>
+              </p:ext>
+            </p:extLst>
+          </p:nvPr>
+        </p:nvSpPr>
+        <p:spPr>
+          <a:xfrm rot="5400000">
+            <a:off x="5307778" y="-5307777"/>
+            <a:ext cx="1576446" cy="12192001"/>
+          </a:xfrm>
+          <a:prstGeom prst="rect">
+            <a:avLst/>
+          </a:prstGeom>
+          <a:gradFill>
+            <a:gsLst>
+              <a:gs pos="16000">
+                <a:srgbClr val="000000">
+                  <a:alpha val="0"/>
+                </a:srgbClr>
+              </a:gs>
+              <a:gs pos="99000">
+                <a:srgbClr val="000000">
+                  <a:alpha val="87000"/>
+                </a:srgbClr>
+              </a:gs>
+            </a:gsLst>
+            <a:lin ang="11400000" scaled="0"/>
+          </a:gradFill>
+          <a:ln>
+            <a:noFill/>
+          </a:ln>
+        </p:spPr>
+        <p:style>
+          <a:lnRef idx="2">
+            <a:schemeClr val="accent1">
+              <a:shade val="50000"/>
+            </a:schemeClr>
+          </a:lnRef>
+          <a:fillRef idx="1">
+            <a:schemeClr val="accent1"/>
+          </a:fillRef>
+          <a:effectRef idx="0">
+            <a:schemeClr val="accent1"/>
+          </a:effectRef>
+          <a:fontRef idx="minor">
+            <a:schemeClr val="lt1"/>
+          </a:fontRef>
+        </p:style>
+        <p:txBody>
+          <a:bodyPr rtlCol="0" anchor="ctr"/>
+          <a:lstStyle/>
+          <a:p>
+            <a:pPr algn="ctr"/>
+            <a:endParaRPr lang="en-US" dirty="0"/>
+          </a:p>
+        </p:txBody>
+      </p:sp>
+      <p:sp>
+        <p:nvSpPr>
+          <p:cNvPr id="24" name="Rectangle 23">
+            <a:extLst>
+              <a:ext uri="{FF2B5EF4-FFF2-40B4-BE49-F238E27FC236}">
+                <a16:creationId xmlns:a16="http://schemas.microsoft.com/office/drawing/2014/main" id="{DC701763-729E-462F-A5A8-E0DEFEB1E2E4}"/>
+              </a:ext>
+              <a:ext uri="{C183D7F6-B498-43B3-948B-1728B52AA6E4}">
+                <adec:decorative xmlns:adec="http://schemas.microsoft.com/office/drawing/2017/decorative" val="1"/>
+              </a:ext>
+            </a:extLst>
+          </p:cNvPr>
+          <p:cNvSpPr>
+            <a:spLocks noGrp="1" noRot="1" noChangeAspect="1" noMove="1" noResize="1" noEditPoints="1" noAdjustHandles="1" noChangeArrowheads="1" noChangeShapeType="1" noTextEdit="1"/>
+          </p:cNvSpPr>
+          <p:nvPr>
+            <p:extLst>
+              <p:ext uri="{386F3935-93C4-4BCD-93E2-E3B085C9AB24}">
+                <p16:designElem xmlns:p16="http://schemas.microsoft.com/office/powerpoint/2015/main" val="1"/>
+              </p:ext>
+            </p:extLst>
+          </p:nvPr>
+        </p:nvSpPr>
+        <p:spPr>
+          <a:xfrm>
+            <a:off x="3825434" y="986"/>
+            <a:ext cx="4303422" cy="1575461"/>
+          </a:xfrm>
+          <a:prstGeom prst="rect">
+            <a:avLst/>
+          </a:prstGeom>
+          <a:gradFill>
+            <a:gsLst>
+              <a:gs pos="0">
+                <a:schemeClr val="accent1">
+                  <a:alpha val="17000"/>
+                </a:schemeClr>
+              </a:gs>
+              <a:gs pos="74000">
+                <a:schemeClr val="accent1">
+                  <a:lumMod val="50000"/>
+                  <a:alpha val="0"/>
+                </a:schemeClr>
+              </a:gs>
+            </a:gsLst>
+            <a:lin ang="14400000" scaled="0"/>
+          </a:gradFill>
+          <a:ln>
+            <a:noFill/>
+          </a:ln>
+        </p:spPr>
+        <p:style>
+          <a:lnRef idx="2">
+            <a:schemeClr val="accent1">
+              <a:shade val="50000"/>
+            </a:schemeClr>
+          </a:lnRef>
+          <a:fillRef idx="1">
+            <a:schemeClr val="accent1"/>
+          </a:fillRef>
+          <a:effectRef idx="0">
+            <a:schemeClr val="accent1"/>
+          </a:effectRef>
+          <a:fontRef idx="minor">
+            <a:schemeClr val="lt1"/>
+          </a:fontRef>
+        </p:style>
+        <p:txBody>
+          <a:bodyPr rtlCol="0" anchor="ctr"/>
+          <a:lstStyle/>
+          <a:p>
+            <a:pPr algn="ctr"/>
+            <a:endParaRPr lang="en-US"/>
+          </a:p>
+        </p:txBody>
+      </p:sp>
       <p:sp>
         <p:nvSpPr>
           <p:cNvPr id="2" name="Title 1">
@@ -9732,50 +7632,232 @@
         </p:nvSpPr>
         <p:spPr>
           <a:xfrm>
-            <a:off x="1258824" y="410782"/>
-            <a:ext cx="9144000" cy="1344169"/>
+            <a:off x="699714" y="353160"/>
+            <a:ext cx="7091300" cy="898581"/>
           </a:xfrm>
         </p:spPr>
         <p:txBody>
-          <a:bodyPr/>
+          <a:bodyPr anchor="ctr">
+            <a:normAutofit/>
+          </a:bodyPr>
           <a:lstStyle/>
           <a:p>
             <a:pPr algn="l"/>
             <a:r>
-              <a:rPr lang="en-GB" dirty="0"/>
+              <a:rPr lang="en-GB" sz="4000">
+                <a:solidFill>
+                  <a:srgbClr val="FFFFFF"/>
+                </a:solidFill>
+              </a:rPr>
               <a:t>Recommendation</a:t>
             </a:r>
           </a:p>
         </p:txBody>
       </p:sp>
-      <p:graphicFrame>
-        <p:nvGraphicFramePr>
-          <p:cNvPr id="21" name="Text Placeholder 2">
-            <a:extLst>
-              <a:ext uri="{FF2B5EF4-FFF2-40B4-BE49-F238E27FC236}">
-                <a16:creationId xmlns:a16="http://schemas.microsoft.com/office/drawing/2014/main" id="{4BD99D2E-A6CE-2BE3-A6ED-D28972CEF1FE}"/>
-              </a:ext>
-            </a:extLst>
-          </p:cNvPr>
-          <p:cNvGraphicFramePr/>
-          <p:nvPr>
-            <p:extLst>
-              <p:ext uri="{D42A27DB-BD31-4B8C-83A1-F6EECF244321}">
-                <p14:modId xmlns:p14="http://schemas.microsoft.com/office/powerpoint/2010/main" val="821063523"/>
-              </p:ext>
-            </p:extLst>
-          </p:nvPr>
-        </p:nvGraphicFramePr>
-        <p:xfrm>
-          <a:off x="194246" y="2610610"/>
-          <a:ext cx="11803508" cy="4247390"/>
-        </p:xfrm>
-        <a:graphic>
-          <a:graphicData uri="http://schemas.openxmlformats.org/drawingml/2006/diagram">
-            <dgm:relIds xmlns:dgm="http://schemas.openxmlformats.org/drawingml/2006/diagram" xmlns:r="http://schemas.openxmlformats.org/officeDocument/2006/relationships" r:dm="rId2" r:lo="rId3" r:qs="rId4" r:cs="rId5"/>
-          </a:graphicData>
-        </a:graphic>
-      </p:graphicFrame>
+      <p:pic>
+        <p:nvPicPr>
+          <p:cNvPr id="11" name="Picture 10">
+            <a:extLst>
+              <a:ext uri="{FF2B5EF4-FFF2-40B4-BE49-F238E27FC236}">
+                <a16:creationId xmlns:a16="http://schemas.microsoft.com/office/drawing/2014/main" id="{9EF336E9-92AC-9795-85EA-9ACF7DAB2E74}"/>
+              </a:ext>
+            </a:extLst>
+          </p:cNvPr>
+          <p:cNvPicPr>
+            <a:picLocks noChangeAspect="1"/>
+          </p:cNvPicPr>
+          <p:nvPr/>
+        </p:nvPicPr>
+        <p:blipFill>
+          <a:blip r:embed="rId2">
+            <a:extLst>
+              <a:ext uri="{28A0092B-C50C-407E-A947-70E740481C1C}">
+                <a14:useLocalDpi xmlns:a14="http://schemas.microsoft.com/office/drawing/2010/main" val="0"/>
+              </a:ext>
+            </a:extLst>
+          </a:blip>
+          <a:stretch>
+            <a:fillRect/>
+          </a:stretch>
+        </p:blipFill>
+        <p:spPr>
+          <a:xfrm>
+            <a:off x="5293774" y="1875068"/>
+            <a:ext cx="6932827" cy="4956970"/>
+          </a:xfrm>
+          <a:prstGeom prst="rect">
+            <a:avLst/>
+          </a:prstGeom>
+        </p:spPr>
+      </p:pic>
+      <p:grpSp>
+        <p:nvGrpSpPr>
+          <p:cNvPr id="7" name="Group 6">
+            <a:extLst>
+              <a:ext uri="{FF2B5EF4-FFF2-40B4-BE49-F238E27FC236}">
+                <a16:creationId xmlns:a16="http://schemas.microsoft.com/office/drawing/2014/main" id="{90E268C5-D82A-B2C8-E392-EF9875613F8D}"/>
+              </a:ext>
+            </a:extLst>
+          </p:cNvPr>
+          <p:cNvGrpSpPr/>
+          <p:nvPr/>
+        </p:nvGrpSpPr>
+        <p:grpSpPr>
+          <a:xfrm>
+            <a:off x="172822" y="1819536"/>
+            <a:ext cx="6247027" cy="1137593"/>
+            <a:chOff x="0" y="0"/>
+            <a:chExt cx="11803508" cy="1339284"/>
+          </a:xfrm>
+        </p:grpSpPr>
+        <p:sp>
+          <p:nvSpPr>
+            <p:cNvPr id="8" name="Rectangle: Rounded Corners 7">
+              <a:extLst>
+                <a:ext uri="{FF2B5EF4-FFF2-40B4-BE49-F238E27FC236}">
+                  <a16:creationId xmlns:a16="http://schemas.microsoft.com/office/drawing/2014/main" id="{C8E1F320-6F86-9A7E-31F2-6DEC58F58886}"/>
+                </a:ext>
+              </a:extLst>
+            </p:cNvPr>
+            <p:cNvSpPr/>
+            <p:nvPr/>
+          </p:nvSpPr>
+          <p:spPr>
+            <a:xfrm>
+              <a:off x="0" y="0"/>
+              <a:ext cx="11803508" cy="1339284"/>
+            </a:xfrm>
+            <a:prstGeom prst="roundRect">
+              <a:avLst/>
+            </a:prstGeom>
+          </p:spPr>
+          <p:style>
+            <a:lnRef idx="2">
+              <a:schemeClr val="lt1">
+                <a:hueOff val="0"/>
+                <a:satOff val="0"/>
+                <a:lumOff val="0"/>
+                <a:alphaOff val="0"/>
+              </a:schemeClr>
+            </a:lnRef>
+            <a:fillRef idx="1">
+              <a:schemeClr val="accent1">
+                <a:hueOff val="0"/>
+                <a:satOff val="0"/>
+                <a:lumOff val="0"/>
+                <a:alphaOff val="0"/>
+              </a:schemeClr>
+            </a:fillRef>
+            <a:effectRef idx="0">
+              <a:schemeClr val="accent1">
+                <a:hueOff val="0"/>
+                <a:satOff val="0"/>
+                <a:lumOff val="0"/>
+                <a:alphaOff val="0"/>
+              </a:schemeClr>
+            </a:effectRef>
+            <a:fontRef idx="minor">
+              <a:schemeClr val="lt1"/>
+            </a:fontRef>
+          </p:style>
+          <p:txBody>
+            <a:bodyPr/>
+            <a:lstStyle/>
+            <a:p>
+              <a:endParaRPr lang="en-GB"/>
+            </a:p>
+          </p:txBody>
+        </p:sp>
+        <p:sp>
+          <p:nvSpPr>
+            <p:cNvPr id="9" name="Rectangle: Rounded Corners 4">
+              <a:extLst>
+                <a:ext uri="{FF2B5EF4-FFF2-40B4-BE49-F238E27FC236}">
+                  <a16:creationId xmlns:a16="http://schemas.microsoft.com/office/drawing/2014/main" id="{3332338C-B207-547F-7992-31A0D71A6E74}"/>
+                </a:ext>
+              </a:extLst>
+            </p:cNvPr>
+            <p:cNvSpPr txBox="1"/>
+            <p:nvPr/>
+          </p:nvSpPr>
+          <p:spPr>
+            <a:xfrm>
+              <a:off x="65378" y="65378"/>
+              <a:ext cx="11672752" cy="1208528"/>
+            </a:xfrm>
+            <a:prstGeom prst="rect">
+              <a:avLst/>
+            </a:prstGeom>
+          </p:spPr>
+          <p:style>
+            <a:lnRef idx="0">
+              <a:scrgbClr r="0" g="0" b="0"/>
+            </a:lnRef>
+            <a:fillRef idx="0">
+              <a:scrgbClr r="0" g="0" b="0"/>
+            </a:fillRef>
+            <a:effectRef idx="0">
+              <a:scrgbClr r="0" g="0" b="0"/>
+            </a:effectRef>
+            <a:fontRef idx="minor">
+              <a:schemeClr val="lt1"/>
+            </a:fontRef>
+          </p:style>
+          <p:txBody>
+            <a:bodyPr spcFirstLastPara="0" vert="horz" wrap="square" lIns="91440" tIns="91440" rIns="91440" bIns="91440" numCol="1" spcCol="1270" anchor="ctr" anchorCtr="0">
+              <a:noAutofit/>
+            </a:bodyPr>
+            <a:lstStyle/>
+            <a:p>
+              <a:pPr defTabSz="458724">
+                <a:lnSpc>
+                  <a:spcPct val="90000"/>
+                </a:lnSpc>
+                <a:spcBef>
+                  <a:spcPct val="0"/>
+                </a:spcBef>
+                <a:spcAft>
+                  <a:spcPct val="35000"/>
+                </a:spcAft>
+              </a:pPr>
+              <a:r>
+                <a:rPr lang="en-GB" sz="2400" kern="1200" dirty="0">
+                  <a:solidFill>
+                    <a:schemeClr val="lt1"/>
+                  </a:solidFill>
+                  <a:latin typeface="+mn-lt"/>
+                  <a:ea typeface="+mn-ea"/>
+                  <a:cs typeface="+mn-cs"/>
+                </a:rPr>
+                <a:t>1. Only 50.9% of high availability homes/</a:t>
+              </a:r>
+              <a:r>
+                <a:rPr lang="en-GB" sz="2400" kern="1200" dirty="0" err="1">
+                  <a:solidFill>
+                    <a:schemeClr val="lt1"/>
+                  </a:solidFill>
+                  <a:latin typeface="+mn-lt"/>
+                  <a:ea typeface="+mn-ea"/>
+                  <a:cs typeface="+mn-cs"/>
+                </a:rPr>
+                <a:t>apts</a:t>
+              </a:r>
+              <a:r>
+                <a:rPr lang="en-GB" sz="2400" kern="1200" dirty="0">
+                  <a:solidFill>
+                    <a:schemeClr val="lt1"/>
+                  </a:solidFill>
+                  <a:latin typeface="+mn-lt"/>
+                  <a:ea typeface="+mn-ea"/>
+                  <a:cs typeface="+mn-cs"/>
+                </a:rPr>
+                <a:t> are above the median so the price dose not effect availability that much. </a:t>
+              </a:r>
+              <a:endParaRPr lang="en-US" sz="2400" kern="1200" dirty="0"/>
+            </a:p>
+          </p:txBody>
+        </p:sp>
+      </p:grpSp>
     </p:spTree>
     <p:extLst>
       <p:ext uri="{BB962C8B-B14F-4D97-AF65-F5344CB8AC3E}">
@@ -9790,6 +7872,228 @@
 </file>
 
 <file path=ppt/slides/slide5.xml><?xml version="1.0" encoding="utf-8"?>
+<p:sld xmlns:a="http://schemas.openxmlformats.org/drawingml/2006/main" xmlns:r="http://schemas.openxmlformats.org/officeDocument/2006/relationships" xmlns:p="http://schemas.openxmlformats.org/presentationml/2006/main">
+  <p:cSld>
+    <p:spTree>
+      <p:nvGrpSpPr>
+        <p:cNvPr id="1" name=""/>
+        <p:cNvGrpSpPr/>
+        <p:nvPr/>
+      </p:nvGrpSpPr>
+      <p:grpSpPr>
+        <a:xfrm>
+          <a:off x="0" y="0"/>
+          <a:ext cx="0" cy="0"/>
+          <a:chOff x="0" y="0"/>
+          <a:chExt cx="0" cy="0"/>
+        </a:xfrm>
+      </p:grpSpPr>
+      <p:pic>
+        <p:nvPicPr>
+          <p:cNvPr id="6" name="Picture 5" descr="Bar chart compares review scores across availability categories. Blue bars show high availability at 4.82 and normal availability at 4.87, with normal availability slightly higher; y-axis spans 0–5 and legend identifies review_scores_rating.&#10;&#10;AI-generated content may be incorrect.">
+            <a:extLst>
+              <a:ext uri="{FF2B5EF4-FFF2-40B4-BE49-F238E27FC236}">
+                <a16:creationId xmlns:a16="http://schemas.microsoft.com/office/drawing/2014/main" id="{4C83A743-BB33-989A-0308-87D97AE894E0}"/>
+              </a:ext>
+            </a:extLst>
+          </p:cNvPr>
+          <p:cNvPicPr>
+            <a:picLocks noChangeAspect="1"/>
+          </p:cNvPicPr>
+          <p:nvPr/>
+        </p:nvPicPr>
+        <p:blipFill>
+          <a:blip r:embed="rId2">
+            <a:extLst>
+              <a:ext uri="{28A0092B-C50C-407E-A947-70E740481C1C}">
+                <a14:useLocalDpi xmlns:a14="http://schemas.microsoft.com/office/drawing/2010/main" val="0"/>
+              </a:ext>
+            </a:extLst>
+          </a:blip>
+          <a:stretch>
+            <a:fillRect/>
+          </a:stretch>
+        </p:blipFill>
+        <p:spPr>
+          <a:xfrm>
+            <a:off x="1654683" y="1197151"/>
+            <a:ext cx="8175117" cy="5839369"/>
+          </a:xfrm>
+          <a:prstGeom prst="rect">
+            <a:avLst/>
+          </a:prstGeom>
+        </p:spPr>
+      </p:pic>
+      <p:grpSp>
+        <p:nvGrpSpPr>
+          <p:cNvPr id="2" name="Group 1">
+            <a:extLst>
+              <a:ext uri="{FF2B5EF4-FFF2-40B4-BE49-F238E27FC236}">
+                <a16:creationId xmlns:a16="http://schemas.microsoft.com/office/drawing/2014/main" id="{7D91B9DA-1139-D59B-3F5B-13B820C9AB77}"/>
+              </a:ext>
+            </a:extLst>
+          </p:cNvPr>
+          <p:cNvGrpSpPr/>
+          <p:nvPr/>
+        </p:nvGrpSpPr>
+        <p:grpSpPr>
+          <a:xfrm>
+            <a:off x="111950" y="205528"/>
+            <a:ext cx="11803508" cy="1330875"/>
+            <a:chOff x="0" y="554647"/>
+            <a:chExt cx="11803508" cy="1330875"/>
+          </a:xfrm>
+        </p:grpSpPr>
+        <p:sp>
+          <p:nvSpPr>
+            <p:cNvPr id="3" name="Rectangle: Rounded Corners 2">
+              <a:extLst>
+                <a:ext uri="{FF2B5EF4-FFF2-40B4-BE49-F238E27FC236}">
+                  <a16:creationId xmlns:a16="http://schemas.microsoft.com/office/drawing/2014/main" id="{1F945F9E-8A53-B81A-B23F-3253A782EA5F}"/>
+                </a:ext>
+              </a:extLst>
+            </p:cNvPr>
+            <p:cNvSpPr/>
+            <p:nvPr/>
+          </p:nvSpPr>
+          <p:spPr>
+            <a:xfrm>
+              <a:off x="0" y="554647"/>
+              <a:ext cx="11803508" cy="1330875"/>
+            </a:xfrm>
+            <a:prstGeom prst="roundRect">
+              <a:avLst/>
+            </a:prstGeom>
+          </p:spPr>
+          <p:style>
+            <a:lnRef idx="2">
+              <a:schemeClr val="lt1">
+                <a:hueOff val="0"/>
+                <a:satOff val="0"/>
+                <a:lumOff val="0"/>
+                <a:alphaOff val="0"/>
+              </a:schemeClr>
+            </a:lnRef>
+            <a:fillRef idx="1">
+              <a:schemeClr val="accent1">
+                <a:hueOff val="0"/>
+                <a:satOff val="0"/>
+                <a:lumOff val="0"/>
+                <a:alphaOff val="0"/>
+              </a:schemeClr>
+            </a:fillRef>
+            <a:effectRef idx="0">
+              <a:schemeClr val="accent1">
+                <a:hueOff val="0"/>
+                <a:satOff val="0"/>
+                <a:lumOff val="0"/>
+                <a:alphaOff val="0"/>
+              </a:schemeClr>
+            </a:effectRef>
+            <a:fontRef idx="minor">
+              <a:schemeClr val="lt1"/>
+            </a:fontRef>
+          </p:style>
+          <p:txBody>
+            <a:bodyPr/>
+            <a:lstStyle/>
+            <a:p>
+              <a:endParaRPr lang="en-GB"/>
+            </a:p>
+          </p:txBody>
+        </p:sp>
+        <p:sp>
+          <p:nvSpPr>
+            <p:cNvPr id="4" name="Rectangle: Rounded Corners 4">
+              <a:extLst>
+                <a:ext uri="{FF2B5EF4-FFF2-40B4-BE49-F238E27FC236}">
+                  <a16:creationId xmlns:a16="http://schemas.microsoft.com/office/drawing/2014/main" id="{155C157F-DBC9-DC54-96E5-B9168A610FB1}"/>
+                </a:ext>
+              </a:extLst>
+            </p:cNvPr>
+            <p:cNvSpPr txBox="1"/>
+            <p:nvPr/>
+          </p:nvSpPr>
+          <p:spPr>
+            <a:xfrm>
+              <a:off x="64968" y="619615"/>
+              <a:ext cx="11673572" cy="1200939"/>
+            </a:xfrm>
+            <a:prstGeom prst="rect">
+              <a:avLst/>
+            </a:prstGeom>
+          </p:spPr>
+          <p:style>
+            <a:lnRef idx="0">
+              <a:scrgbClr r="0" g="0" b="0"/>
+            </a:lnRef>
+            <a:fillRef idx="0">
+              <a:scrgbClr r="0" g="0" b="0"/>
+            </a:fillRef>
+            <a:effectRef idx="0">
+              <a:scrgbClr r="0" g="0" b="0"/>
+            </a:effectRef>
+            <a:fontRef idx="minor">
+              <a:schemeClr val="lt1"/>
+            </a:fontRef>
+          </p:style>
+          <p:txBody>
+            <a:bodyPr spcFirstLastPara="0" vert="horz" wrap="square" lIns="91440" tIns="91440" rIns="91440" bIns="91440" numCol="1" spcCol="1270" anchor="ctr" anchorCtr="0">
+              <a:noAutofit/>
+            </a:bodyPr>
+            <a:lstStyle/>
+            <a:p>
+              <a:pPr marL="0" lvl="0" indent="0" algn="l" defTabSz="1066800">
+                <a:lnSpc>
+                  <a:spcPct val="90000"/>
+                </a:lnSpc>
+                <a:spcBef>
+                  <a:spcPct val="0"/>
+                </a:spcBef>
+                <a:spcAft>
+                  <a:spcPct val="35000"/>
+                </a:spcAft>
+                <a:buNone/>
+              </a:pPr>
+              <a:r>
+                <a:rPr lang="en-GB" sz="2400" kern="1200" dirty="0"/>
+                <a:t>2. The average review score of high availability homes/</a:t>
+              </a:r>
+              <a:r>
+                <a:rPr lang="en-GB" sz="2400" kern="1200" dirty="0" err="1"/>
+                <a:t>apts</a:t>
+              </a:r>
+              <a:r>
+                <a:rPr lang="en-GB" sz="2400" kern="1200" dirty="0"/>
+                <a:t> is 4.82 and the average review score for normal homes/</a:t>
+              </a:r>
+              <a:r>
+                <a:rPr lang="en-GB" sz="2400" kern="1200" dirty="0" err="1"/>
+                <a:t>apts</a:t>
+              </a:r>
+              <a:r>
+                <a:rPr lang="en-GB" sz="2400" kern="1200" dirty="0"/>
+                <a:t> is 4.87. The difference is not large so the review score do not effect availability.</a:t>
+              </a:r>
+              <a:endParaRPr lang="en-US" sz="2400" kern="1200" dirty="0"/>
+            </a:p>
+          </p:txBody>
+        </p:sp>
+      </p:grpSp>
+    </p:spTree>
+    <p:extLst>
+      <p:ext uri="{BB962C8B-B14F-4D97-AF65-F5344CB8AC3E}">
+        <p14:creationId xmlns:p14="http://schemas.microsoft.com/office/powerpoint/2010/main" val="1821698787"/>
+      </p:ext>
+    </p:extLst>
+  </p:cSld>
+  <p:clrMapOvr>
+    <a:masterClrMapping/>
+  </p:clrMapOvr>
+</p:sld>
+</file>
+
+<file path=ppt/slides/slide6.xml><?xml version="1.0" encoding="utf-8"?>
 <p:sld xmlns:a="http://schemas.openxmlformats.org/drawingml/2006/main" xmlns:r="http://schemas.openxmlformats.org/officeDocument/2006/relationships" xmlns:p="http://schemas.openxmlformats.org/presentationml/2006/main">
   <p:cSld>
     <p:bg>
@@ -10126,14 +8430,170 @@
         </p:blipFill>
         <p:spPr>
           <a:xfrm>
-            <a:off x="838200" y="704765"/>
-            <a:ext cx="10628376" cy="5440003"/>
+            <a:off x="754093" y="1353437"/>
+            <a:ext cx="10674023" cy="5463367"/>
           </a:xfrm>
           <a:prstGeom prst="rect">
             <a:avLst/>
           </a:prstGeom>
         </p:spPr>
       </p:pic>
+      <p:grpSp>
+        <p:nvGrpSpPr>
+          <p:cNvPr id="5" name="Group 4">
+            <a:extLst>
+              <a:ext uri="{FF2B5EF4-FFF2-40B4-BE49-F238E27FC236}">
+                <a16:creationId xmlns:a16="http://schemas.microsoft.com/office/drawing/2014/main" id="{076445A7-8D12-157E-1567-C38EFB025001}"/>
+              </a:ext>
+            </a:extLst>
+          </p:cNvPr>
+          <p:cNvGrpSpPr/>
+          <p:nvPr/>
+        </p:nvGrpSpPr>
+        <p:grpSpPr>
+          <a:xfrm>
+            <a:off x="194245" y="136637"/>
+            <a:ext cx="11803508" cy="1216800"/>
+            <a:chOff x="0" y="266322"/>
+            <a:chExt cx="11803508" cy="1216800"/>
+          </a:xfrm>
+        </p:grpSpPr>
+        <p:sp>
+          <p:nvSpPr>
+            <p:cNvPr id="6" name="Rectangle: Rounded Corners 5">
+              <a:extLst>
+                <a:ext uri="{FF2B5EF4-FFF2-40B4-BE49-F238E27FC236}">
+                  <a16:creationId xmlns:a16="http://schemas.microsoft.com/office/drawing/2014/main" id="{2E772901-9E5F-8415-449A-EB2DFEDF488A}"/>
+                </a:ext>
+              </a:extLst>
+            </p:cNvPr>
+            <p:cNvSpPr/>
+            <p:nvPr/>
+          </p:nvSpPr>
+          <p:spPr>
+            <a:xfrm>
+              <a:off x="0" y="266322"/>
+              <a:ext cx="11803508" cy="1216800"/>
+            </a:xfrm>
+            <a:prstGeom prst="roundRect">
+              <a:avLst/>
+            </a:prstGeom>
+          </p:spPr>
+          <p:style>
+            <a:lnRef idx="2">
+              <a:schemeClr val="lt1">
+                <a:hueOff val="0"/>
+                <a:satOff val="0"/>
+                <a:lumOff val="0"/>
+                <a:alphaOff val="0"/>
+              </a:schemeClr>
+            </a:lnRef>
+            <a:fillRef idx="1">
+              <a:schemeClr val="accent1">
+                <a:hueOff val="0"/>
+                <a:satOff val="0"/>
+                <a:lumOff val="0"/>
+                <a:alphaOff val="0"/>
+              </a:schemeClr>
+            </a:fillRef>
+            <a:effectRef idx="0">
+              <a:schemeClr val="accent1">
+                <a:hueOff val="0"/>
+                <a:satOff val="0"/>
+                <a:lumOff val="0"/>
+                <a:alphaOff val="0"/>
+              </a:schemeClr>
+            </a:effectRef>
+            <a:fontRef idx="minor">
+              <a:schemeClr val="lt1"/>
+            </a:fontRef>
+          </p:style>
+          <p:txBody>
+            <a:bodyPr/>
+            <a:lstStyle/>
+            <a:p>
+              <a:endParaRPr lang="en-GB"/>
+            </a:p>
+          </p:txBody>
+        </p:sp>
+        <p:sp>
+          <p:nvSpPr>
+            <p:cNvPr id="7" name="Rectangle: Rounded Corners 4">
+              <a:extLst>
+                <a:ext uri="{FF2B5EF4-FFF2-40B4-BE49-F238E27FC236}">
+                  <a16:creationId xmlns:a16="http://schemas.microsoft.com/office/drawing/2014/main" id="{817901DC-50F1-4C13-4367-1600B663322D}"/>
+                </a:ext>
+              </a:extLst>
+            </p:cNvPr>
+            <p:cNvSpPr txBox="1"/>
+            <p:nvPr/>
+          </p:nvSpPr>
+          <p:spPr>
+            <a:xfrm>
+              <a:off x="59399" y="325721"/>
+              <a:ext cx="11684710" cy="1098002"/>
+            </a:xfrm>
+            <a:prstGeom prst="rect">
+              <a:avLst/>
+            </a:prstGeom>
+          </p:spPr>
+          <p:style>
+            <a:lnRef idx="0">
+              <a:scrgbClr r="0" g="0" b="0"/>
+            </a:lnRef>
+            <a:fillRef idx="0">
+              <a:scrgbClr r="0" g="0" b="0"/>
+            </a:fillRef>
+            <a:effectRef idx="0">
+              <a:scrgbClr r="0" g="0" b="0"/>
+            </a:effectRef>
+            <a:fontRef idx="minor">
+              <a:schemeClr val="lt1"/>
+            </a:fontRef>
+          </p:style>
+          <p:txBody>
+            <a:bodyPr spcFirstLastPara="0" vert="horz" wrap="square" lIns="91440" tIns="91440" rIns="91440" bIns="91440" numCol="1" spcCol="1270" anchor="ctr" anchorCtr="0">
+              <a:noAutofit/>
+            </a:bodyPr>
+            <a:lstStyle/>
+            <a:p>
+              <a:pPr marL="0" lvl="0" indent="0" algn="l" defTabSz="1066800">
+                <a:lnSpc>
+                  <a:spcPct val="90000"/>
+                </a:lnSpc>
+                <a:spcBef>
+                  <a:spcPct val="0"/>
+                </a:spcBef>
+                <a:spcAft>
+                  <a:spcPct val="35000"/>
+                </a:spcAft>
+                <a:buNone/>
+              </a:pPr>
+              <a:r>
+                <a:rPr lang="en-GB" sz="2400" kern="1200" dirty="0"/>
+                <a:t>3. Rent home/</a:t>
+              </a:r>
+              <a:r>
+                <a:rPr lang="en-GB" sz="2400" kern="1200" dirty="0" err="1"/>
+                <a:t>apts</a:t>
+              </a:r>
+              <a:r>
+                <a:rPr lang="en-GB" sz="2400" kern="1200" dirty="0"/>
+                <a:t> in regions with lower high availability homes/</a:t>
+              </a:r>
+              <a:r>
+                <a:rPr lang="en-GB" sz="2400" kern="1200" dirty="0" err="1"/>
+                <a:t>apts</a:t>
+              </a:r>
+              <a:r>
+                <a:rPr lang="en-GB" sz="2400" kern="1200" dirty="0"/>
+                <a:t> percentage.</a:t>
+              </a:r>
+              <a:endParaRPr lang="en-US" sz="2400" kern="1200" dirty="0"/>
+            </a:p>
+          </p:txBody>
+        </p:sp>
+      </p:grpSp>
     </p:spTree>
     <p:extLst>
       <p:ext uri="{BB962C8B-B14F-4D97-AF65-F5344CB8AC3E}">
@@ -10147,7 +8607,7 @@
 </p:sld>
 </file>
 
-<file path=ppt/slides/slide6.xml><?xml version="1.0" encoding="utf-8"?>
+<file path=ppt/slides/slide7.xml><?xml version="1.0" encoding="utf-8"?>
 <p:sld xmlns:a="http://schemas.openxmlformats.org/drawingml/2006/main" xmlns:r="http://schemas.openxmlformats.org/officeDocument/2006/relationships" xmlns:p="http://schemas.openxmlformats.org/presentationml/2006/main">
   <p:cSld>
     <p:bg>
